--- a/Mapped Curriculum Lessons/Grade 6/Lesson 02 - Operators and Integers/Operators and Integers - Slides.pptx
+++ b/Mapped Curriculum Lessons/Grade 6/Lesson 02 - Operators and Integers/Operators and Integers - Slides.pptx
@@ -2,28 +2,28 @@
 <file path=ppt/presentation.xml><?xml version="1.0" encoding="utf-8"?>
 <p:presentation xmlns:p="http://schemas.openxmlformats.org/presentationml/2006/main" embedTrueTypeFonts="1" saveSubsetFonts="0">
   <p:sldMasterIdLst>
-    <p:sldMasterId xmlns:r="http://schemas.openxmlformats.org/officeDocument/2006/relationships" id="2147483648" r:id="Rf1668ee942bb4ade"/>
+    <p:sldMasterId xmlns:r="http://schemas.openxmlformats.org/officeDocument/2006/relationships" id="2147483648" r:id="R92f7cb9c43f24a07"/>
   </p:sldMasterIdLst>
   <p:notesMasterIdLst>
-    <p:notesMasterId xmlns:r="http://schemas.openxmlformats.org/officeDocument/2006/relationships" r:id="R0cc880a1fb87428d"/>
+    <p:notesMasterId xmlns:r="http://schemas.openxmlformats.org/officeDocument/2006/relationships" r:id="R7c15dffda5ca4cc3"/>
   </p:notesMasterIdLst>
   <p:sldIdLst>
-    <p:sldId xmlns:r="http://schemas.openxmlformats.org/officeDocument/2006/relationships" id="256" r:id="Rbff5a7500643463b"/>
-    <p:sldId xmlns:r="http://schemas.openxmlformats.org/officeDocument/2006/relationships" id="257" r:id="R5482e514ad8c4bfc"/>
-    <p:sldId xmlns:r="http://schemas.openxmlformats.org/officeDocument/2006/relationships" id="258" r:id="R4cea2716d1b74cc7"/>
-    <p:sldId xmlns:r="http://schemas.openxmlformats.org/officeDocument/2006/relationships" id="259" r:id="Rc2bfed2479ea4bc4"/>
-    <p:sldId xmlns:r="http://schemas.openxmlformats.org/officeDocument/2006/relationships" id="260" r:id="R6a646abc46d24ec1"/>
-    <p:sldId xmlns:r="http://schemas.openxmlformats.org/officeDocument/2006/relationships" id="261" r:id="Rb87a946b43664280"/>
-    <p:sldId xmlns:r="http://schemas.openxmlformats.org/officeDocument/2006/relationships" id="262" r:id="Rd2046aafdfb146e9"/>
-    <p:sldId xmlns:r="http://schemas.openxmlformats.org/officeDocument/2006/relationships" id="263" r:id="R1b636e4722e54261"/>
-    <p:sldId xmlns:r="http://schemas.openxmlformats.org/officeDocument/2006/relationships" id="264" r:id="R577fb1660fd14ca0"/>
+    <p:sldId xmlns:r="http://schemas.openxmlformats.org/officeDocument/2006/relationships" id="256" r:id="R60ab0a7df6ff4d69"/>
+    <p:sldId xmlns:r="http://schemas.openxmlformats.org/officeDocument/2006/relationships" id="257" r:id="R613ec0e26721474f"/>
+    <p:sldId xmlns:r="http://schemas.openxmlformats.org/officeDocument/2006/relationships" id="258" r:id="Rcfff8563079a4deb"/>
+    <p:sldId xmlns:r="http://schemas.openxmlformats.org/officeDocument/2006/relationships" id="259" r:id="R48efb438925148ee"/>
+    <p:sldId xmlns:r="http://schemas.openxmlformats.org/officeDocument/2006/relationships" id="260" r:id="Rb6893682491447d2"/>
+    <p:sldId xmlns:r="http://schemas.openxmlformats.org/officeDocument/2006/relationships" id="261" r:id="Rda6714e28153458f"/>
+    <p:sldId xmlns:r="http://schemas.openxmlformats.org/officeDocument/2006/relationships" id="262" r:id="R328828292ff74bcb"/>
+    <p:sldId xmlns:r="http://schemas.openxmlformats.org/officeDocument/2006/relationships" id="263" r:id="R47f1d0804f3e4723"/>
+    <p:sldId xmlns:r="http://schemas.openxmlformats.org/officeDocument/2006/relationships" id="264" r:id="Rbc3bf237293f4e30"/>
   </p:sldIdLst>
   <p:sldSz cx="12192000" cy="6858000"/>
   <p:notesSz cx="6858000" cy="9144000"/>
   <p:embeddedFontLst>
     <p:embeddedFont>
       <p:font typeface="JetBrains Mono"/>
-      <p:regular xmlns:r="http://schemas.openxmlformats.org/officeDocument/2006/relationships" r:id="Rb867111d3fd44f37"/>
+      <p:regular xmlns:r="http://schemas.openxmlformats.org/officeDocument/2006/relationships" r:id="R0f8c681c43fb4ae1"/>
     </p:embeddedFont>
   </p:embeddedFontLst>
 </p:presentation>
@@ -1071,7 +1071,7 @@
           <p:nvPr/>
         </p:nvPicPr>
         <p:blipFill rotWithShape="1">
-          <a:blip xmlns:r="http://schemas.openxmlformats.org/officeDocument/2006/relationships" xmlns:a="http://schemas.openxmlformats.org/drawingml/2006/main" r:embed="R3ee3e42ef02a4147"/>
+          <a:blip xmlns:r="http://schemas.openxmlformats.org/officeDocument/2006/relationships" xmlns:a="http://schemas.openxmlformats.org/drawingml/2006/main" r:embed="Reb5304e06c854e9a"/>
           <a:stretch xmlns:a="http://schemas.openxmlformats.org/drawingml/2006/main"/>
         </p:blipFill>
         <p:spPr>
@@ -1451,7 +1451,7 @@
           <p:nvPr/>
         </p:nvPicPr>
         <p:blipFill rotWithShape="1">
-          <a:blip xmlns:r="http://schemas.openxmlformats.org/officeDocument/2006/relationships" xmlns:a="http://schemas.openxmlformats.org/drawingml/2006/main" r:embed="R14edb11f643b4aa2">
+          <a:blip xmlns:r="http://schemas.openxmlformats.org/officeDocument/2006/relationships" xmlns:a="http://schemas.openxmlformats.org/drawingml/2006/main" r:embed="R89eff004c5e84e74">
             <a:alphaModFix amt="28000"/>
           </a:blip>
           <a:stretch xmlns:a="http://schemas.openxmlformats.org/drawingml/2006/main"/>
@@ -1664,7 +1664,7 @@
           <p:nvPr/>
         </p:nvPicPr>
         <p:blipFill rotWithShape="1">
-          <a:blip xmlns:r="http://schemas.openxmlformats.org/officeDocument/2006/relationships" xmlns:a="http://schemas.openxmlformats.org/drawingml/2006/main" r:embed="R79560d47492c4d7c">
+          <a:blip xmlns:r="http://schemas.openxmlformats.org/officeDocument/2006/relationships" xmlns:a="http://schemas.openxmlformats.org/drawingml/2006/main" r:embed="R14278f3e0644414f">
             <a:alphaModFix amt="28000"/>
           </a:blip>
           <a:stretch xmlns:a="http://schemas.openxmlformats.org/drawingml/2006/main"/>
@@ -1899,7 +1899,7 @@
           <p:nvPr/>
         </p:nvPicPr>
         <p:blipFill rotWithShape="1">
-          <a:blip xmlns:r="http://schemas.openxmlformats.org/officeDocument/2006/relationships" xmlns:a="http://schemas.openxmlformats.org/drawingml/2006/main" r:embed="Rc3e7910892c641c2">
+          <a:blip xmlns:r="http://schemas.openxmlformats.org/officeDocument/2006/relationships" xmlns:a="http://schemas.openxmlformats.org/drawingml/2006/main" r:embed="R0bdbecfc032c410c">
             <a:alphaModFix amt="28000"/>
           </a:blip>
           <a:stretch xmlns:a="http://schemas.openxmlformats.org/drawingml/2006/main"/>
@@ -2176,7 +2176,7 @@
           <p:nvPr/>
         </p:nvPicPr>
         <p:blipFill rotWithShape="1">
-          <a:blip xmlns:r="http://schemas.openxmlformats.org/officeDocument/2006/relationships" xmlns:a="http://schemas.openxmlformats.org/drawingml/2006/main" r:embed="R6ca095d6d4d240ff">
+          <a:blip xmlns:r="http://schemas.openxmlformats.org/officeDocument/2006/relationships" xmlns:a="http://schemas.openxmlformats.org/drawingml/2006/main" r:embed="Ree4edb3652564786">
             <a:alphaModFix amt="28000"/>
           </a:blip>
           <a:stretch xmlns:a="http://schemas.openxmlformats.org/drawingml/2006/main"/>
@@ -2451,7 +2451,7 @@
           <p:nvPr/>
         </p:nvPicPr>
         <p:blipFill rotWithShape="1">
-          <a:blip xmlns:r="http://schemas.openxmlformats.org/officeDocument/2006/relationships" xmlns:a="http://schemas.openxmlformats.org/drawingml/2006/main" r:embed="R2c936192f5714353">
+          <a:blip xmlns:r="http://schemas.openxmlformats.org/officeDocument/2006/relationships" xmlns:a="http://schemas.openxmlformats.org/drawingml/2006/main" r:embed="R1892610391914745">
             <a:alphaModFix amt="28000"/>
           </a:blip>
           <a:stretch xmlns:a="http://schemas.openxmlformats.org/drawingml/2006/main"/>
@@ -2875,7 +2875,7 @@
           <p:nvPr/>
         </p:nvPicPr>
         <p:blipFill rotWithShape="1">
-          <a:blip xmlns:r="http://schemas.openxmlformats.org/officeDocument/2006/relationships" xmlns:a="http://schemas.openxmlformats.org/drawingml/2006/main" r:embed="Rcc601aa6c2e241eb">
+          <a:blip xmlns:r="http://schemas.openxmlformats.org/officeDocument/2006/relationships" xmlns:a="http://schemas.openxmlformats.org/drawingml/2006/main" r:embed="Re78a707cf1b54a2d">
             <a:alphaModFix amt="28000"/>
           </a:blip>
           <a:stretch xmlns:a="http://schemas.openxmlformats.org/drawingml/2006/main"/>
@@ -3016,7 +3016,7 @@
           <p:nvPr/>
         </p:nvPicPr>
         <p:blipFill rotWithShape="1">
-          <a:blip xmlns:r="http://schemas.openxmlformats.org/officeDocument/2006/relationships" xmlns:a="http://schemas.openxmlformats.org/drawingml/2006/main" r:embed="Rc59d95e5787d4c11">
+          <a:blip xmlns:r="http://schemas.openxmlformats.org/officeDocument/2006/relationships" xmlns:a="http://schemas.openxmlformats.org/drawingml/2006/main" r:embed="R1f66b078b37f4c5d">
             <a:alphaModFix amt="28000"/>
           </a:blip>
           <a:stretch xmlns:a="http://schemas.openxmlformats.org/drawingml/2006/main"/>
@@ -3130,7 +3130,7 @@
           <p:nvPr/>
         </p:nvPicPr>
         <p:blipFill rotWithShape="1">
-          <a:blip xmlns:r="http://schemas.openxmlformats.org/officeDocument/2006/relationships" xmlns:a="http://schemas.openxmlformats.org/drawingml/2006/main" r:embed="Rd8e8b880b6294ada">
+          <a:blip xmlns:r="http://schemas.openxmlformats.org/officeDocument/2006/relationships" xmlns:a="http://schemas.openxmlformats.org/drawingml/2006/main" r:embed="Rc074b0a02cf24b05">
             <a:alphaModFix amt="28000"/>
           </a:blip>
           <a:stretch xmlns:a="http://schemas.openxmlformats.org/drawingml/2006/main"/>
@@ -3457,7 +3457,7 @@
           <p:nvPr/>
         </p:nvPicPr>
         <p:blipFill rotWithShape="1">
-          <a:blip xmlns:r="http://schemas.openxmlformats.org/officeDocument/2006/relationships" xmlns:a="http://schemas.openxmlformats.org/drawingml/2006/main" r:embed="Rfca8ec5503b04f27">
+          <a:blip xmlns:r="http://schemas.openxmlformats.org/officeDocument/2006/relationships" xmlns:a="http://schemas.openxmlformats.org/drawingml/2006/main" r:embed="R78ac02d741384b1f">
             <a:alphaModFix amt="28000"/>
           </a:blip>
           <a:stretch xmlns:a="http://schemas.openxmlformats.org/drawingml/2006/main"/>
@@ -3745,7 +3745,7 @@
           <p:nvPr/>
         </p:nvPicPr>
         <p:blipFill rotWithShape="1">
-          <a:blip xmlns:r="http://schemas.openxmlformats.org/officeDocument/2006/relationships" xmlns:a="http://schemas.openxmlformats.org/drawingml/2006/main" r:embed="R3ec28f5c12f749b7">
+          <a:blip xmlns:r="http://schemas.openxmlformats.org/officeDocument/2006/relationships" xmlns:a="http://schemas.openxmlformats.org/drawingml/2006/main" r:embed="R97ee8358a82f4c4b">
             <a:alphaModFix amt="28000"/>
           </a:blip>
           <a:stretch xmlns:a="http://schemas.openxmlformats.org/drawingml/2006/main"/>
@@ -3982,17 +3982,17 @@
   </p:cSld>
   <p:clrMap bg1="lt1" tx1="dk1" bg2="lt2" tx2="dk2" accent1="accent1" accent2="accent2" accent3="accent3" accent4="accent4" accent5="accent5" accent6="accent6" hlink="hlink" folHlink="folHlink"/>
   <p:sldLayoutIdLst>
-    <p:sldLayoutId xmlns:r="http://schemas.openxmlformats.org/officeDocument/2006/relationships" id="2147483649" r:id="R17ae9fe660b1477b"/>
-    <p:sldLayoutId xmlns:r="http://schemas.openxmlformats.org/officeDocument/2006/relationships" id="2147483650" r:id="R6558c911b44e4d31"/>
-    <p:sldLayoutId xmlns:r="http://schemas.openxmlformats.org/officeDocument/2006/relationships" id="2147483651" r:id="R9003dfaa0d9c43f3"/>
-    <p:sldLayoutId xmlns:r="http://schemas.openxmlformats.org/officeDocument/2006/relationships" id="2147483652" r:id="Re95440689bea4deb"/>
-    <p:sldLayoutId xmlns:r="http://schemas.openxmlformats.org/officeDocument/2006/relationships" id="2147483653" r:id="R8c06153990cb4443"/>
-    <p:sldLayoutId xmlns:r="http://schemas.openxmlformats.org/officeDocument/2006/relationships" id="2147483654" r:id="R8e5adddd4d7648de"/>
-    <p:sldLayoutId xmlns:r="http://schemas.openxmlformats.org/officeDocument/2006/relationships" id="2147483655" r:id="Rcd20233bd60743ea"/>
-    <p:sldLayoutId xmlns:r="http://schemas.openxmlformats.org/officeDocument/2006/relationships" id="2147483656" r:id="Rb4c54aaa67034735"/>
-    <p:sldLayoutId xmlns:r="http://schemas.openxmlformats.org/officeDocument/2006/relationships" id="2147483657" r:id="Radf69d1e622d4da7"/>
-    <p:sldLayoutId xmlns:r="http://schemas.openxmlformats.org/officeDocument/2006/relationships" id="2147483658" r:id="Rf49fc8ada0b94d51"/>
-    <p:sldLayoutId xmlns:r="http://schemas.openxmlformats.org/officeDocument/2006/relationships" id="2147483659" r:id="R38449e8d86e74699"/>
+    <p:sldLayoutId xmlns:r="http://schemas.openxmlformats.org/officeDocument/2006/relationships" id="2147483649" r:id="Ra582d7505673493d"/>
+    <p:sldLayoutId xmlns:r="http://schemas.openxmlformats.org/officeDocument/2006/relationships" id="2147483650" r:id="Rd6023700a97a4924"/>
+    <p:sldLayoutId xmlns:r="http://schemas.openxmlformats.org/officeDocument/2006/relationships" id="2147483651" r:id="R45a929a8638745b6"/>
+    <p:sldLayoutId xmlns:r="http://schemas.openxmlformats.org/officeDocument/2006/relationships" id="2147483652" r:id="Rb43080b9b70e4958"/>
+    <p:sldLayoutId xmlns:r="http://schemas.openxmlformats.org/officeDocument/2006/relationships" id="2147483653" r:id="R5a2ca7cf70b14c9b"/>
+    <p:sldLayoutId xmlns:r="http://schemas.openxmlformats.org/officeDocument/2006/relationships" id="2147483654" r:id="R3fff0a0437fc43a2"/>
+    <p:sldLayoutId xmlns:r="http://schemas.openxmlformats.org/officeDocument/2006/relationships" id="2147483655" r:id="R985625b95cb24e75"/>
+    <p:sldLayoutId xmlns:r="http://schemas.openxmlformats.org/officeDocument/2006/relationships" id="2147483656" r:id="Rd76506ccedb24ab3"/>
+    <p:sldLayoutId xmlns:r="http://schemas.openxmlformats.org/officeDocument/2006/relationships" id="2147483657" r:id="R80837aa00cfd4d7e"/>
+    <p:sldLayoutId xmlns:r="http://schemas.openxmlformats.org/officeDocument/2006/relationships" id="2147483658" r:id="R05cf2449b4714209"/>
+    <p:sldLayoutId xmlns:r="http://schemas.openxmlformats.org/officeDocument/2006/relationships" id="2147483659" r:id="Rfd02cdaa62324e18"/>
   </p:sldLayoutIdLst>
   <p:hf hdr="0" ftr="0" dt="0"/>
   <p:txStyles>

--- a/Mapped Curriculum Lessons/Grade 6/Lesson 02 - Operators and Integers/Operators and Integers - Slides.pptx
+++ b/Mapped Curriculum Lessons/Grade 6/Lesson 02 - Operators and Integers/Operators and Integers - Slides.pptx
@@ -2,28 +2,28 @@
 <file path=ppt/presentation.xml><?xml version="1.0" encoding="utf-8"?>
 <p:presentation xmlns:p="http://schemas.openxmlformats.org/presentationml/2006/main" embedTrueTypeFonts="1" saveSubsetFonts="0">
   <p:sldMasterIdLst>
-    <p:sldMasterId xmlns:r="http://schemas.openxmlformats.org/officeDocument/2006/relationships" id="2147483648" r:id="R92f7cb9c43f24a07"/>
+    <p:sldMasterId xmlns:r="http://schemas.openxmlformats.org/officeDocument/2006/relationships" id="2147483648" r:id="R1827c3174bbf4eae"/>
   </p:sldMasterIdLst>
   <p:notesMasterIdLst>
-    <p:notesMasterId xmlns:r="http://schemas.openxmlformats.org/officeDocument/2006/relationships" r:id="R7c15dffda5ca4cc3"/>
+    <p:notesMasterId xmlns:r="http://schemas.openxmlformats.org/officeDocument/2006/relationships" r:id="R6be40343a123419d"/>
   </p:notesMasterIdLst>
   <p:sldIdLst>
-    <p:sldId xmlns:r="http://schemas.openxmlformats.org/officeDocument/2006/relationships" id="256" r:id="R60ab0a7df6ff4d69"/>
-    <p:sldId xmlns:r="http://schemas.openxmlformats.org/officeDocument/2006/relationships" id="257" r:id="R613ec0e26721474f"/>
-    <p:sldId xmlns:r="http://schemas.openxmlformats.org/officeDocument/2006/relationships" id="258" r:id="Rcfff8563079a4deb"/>
-    <p:sldId xmlns:r="http://schemas.openxmlformats.org/officeDocument/2006/relationships" id="259" r:id="R48efb438925148ee"/>
-    <p:sldId xmlns:r="http://schemas.openxmlformats.org/officeDocument/2006/relationships" id="260" r:id="Rb6893682491447d2"/>
-    <p:sldId xmlns:r="http://schemas.openxmlformats.org/officeDocument/2006/relationships" id="261" r:id="Rda6714e28153458f"/>
-    <p:sldId xmlns:r="http://schemas.openxmlformats.org/officeDocument/2006/relationships" id="262" r:id="R328828292ff74bcb"/>
-    <p:sldId xmlns:r="http://schemas.openxmlformats.org/officeDocument/2006/relationships" id="263" r:id="R47f1d0804f3e4723"/>
-    <p:sldId xmlns:r="http://schemas.openxmlformats.org/officeDocument/2006/relationships" id="264" r:id="Rbc3bf237293f4e30"/>
+    <p:sldId xmlns:r="http://schemas.openxmlformats.org/officeDocument/2006/relationships" id="256" r:id="R4bb6228ccace431a"/>
+    <p:sldId xmlns:r="http://schemas.openxmlformats.org/officeDocument/2006/relationships" id="257" r:id="Rbf04087797af4fe5"/>
+    <p:sldId xmlns:r="http://schemas.openxmlformats.org/officeDocument/2006/relationships" id="258" r:id="R6090084b11334921"/>
+    <p:sldId xmlns:r="http://schemas.openxmlformats.org/officeDocument/2006/relationships" id="259" r:id="R0ef2dc672e774d4e"/>
+    <p:sldId xmlns:r="http://schemas.openxmlformats.org/officeDocument/2006/relationships" id="260" r:id="Rdf28f446180343b1"/>
+    <p:sldId xmlns:r="http://schemas.openxmlformats.org/officeDocument/2006/relationships" id="261" r:id="Rddf5f64b1ba34120"/>
+    <p:sldId xmlns:r="http://schemas.openxmlformats.org/officeDocument/2006/relationships" id="262" r:id="R3b73ce09333c48d6"/>
+    <p:sldId xmlns:r="http://schemas.openxmlformats.org/officeDocument/2006/relationships" id="263" r:id="R834e0bbad4e14102"/>
+    <p:sldId xmlns:r="http://schemas.openxmlformats.org/officeDocument/2006/relationships" id="264" r:id="Rd5c88502b7594c82"/>
   </p:sldIdLst>
   <p:sldSz cx="12192000" cy="6858000"/>
   <p:notesSz cx="6858000" cy="9144000"/>
   <p:embeddedFontLst>
     <p:embeddedFont>
       <p:font typeface="JetBrains Mono"/>
-      <p:regular xmlns:r="http://schemas.openxmlformats.org/officeDocument/2006/relationships" r:id="R0f8c681c43fb4ae1"/>
+      <p:regular xmlns:r="http://schemas.openxmlformats.org/officeDocument/2006/relationships" r:id="Rdc5e42f902cd47a8"/>
     </p:embeddedFont>
   </p:embeddedFontLst>
 </p:presentation>
@@ -1071,7 +1071,7 @@
           <p:nvPr/>
         </p:nvPicPr>
         <p:blipFill rotWithShape="1">
-          <a:blip xmlns:r="http://schemas.openxmlformats.org/officeDocument/2006/relationships" xmlns:a="http://schemas.openxmlformats.org/drawingml/2006/main" r:embed="Reb5304e06c854e9a"/>
+          <a:blip xmlns:r="http://schemas.openxmlformats.org/officeDocument/2006/relationships" xmlns:a="http://schemas.openxmlformats.org/drawingml/2006/main" r:embed="R5f6eb561c3ef4c00"/>
           <a:stretch xmlns:a="http://schemas.openxmlformats.org/drawingml/2006/main"/>
         </p:blipFill>
         <p:spPr>
@@ -1451,7 +1451,7 @@
           <p:nvPr/>
         </p:nvPicPr>
         <p:blipFill rotWithShape="1">
-          <a:blip xmlns:r="http://schemas.openxmlformats.org/officeDocument/2006/relationships" xmlns:a="http://schemas.openxmlformats.org/drawingml/2006/main" r:embed="R89eff004c5e84e74">
+          <a:blip xmlns:r="http://schemas.openxmlformats.org/officeDocument/2006/relationships" xmlns:a="http://schemas.openxmlformats.org/drawingml/2006/main" r:embed="R8855886de636419a">
             <a:alphaModFix amt="28000"/>
           </a:blip>
           <a:stretch xmlns:a="http://schemas.openxmlformats.org/drawingml/2006/main"/>
@@ -1664,7 +1664,7 @@
           <p:nvPr/>
         </p:nvPicPr>
         <p:blipFill rotWithShape="1">
-          <a:blip xmlns:r="http://schemas.openxmlformats.org/officeDocument/2006/relationships" xmlns:a="http://schemas.openxmlformats.org/drawingml/2006/main" r:embed="R14278f3e0644414f">
+          <a:blip xmlns:r="http://schemas.openxmlformats.org/officeDocument/2006/relationships" xmlns:a="http://schemas.openxmlformats.org/drawingml/2006/main" r:embed="R626f5cdd0e3f4f90">
             <a:alphaModFix amt="28000"/>
           </a:blip>
           <a:stretch xmlns:a="http://schemas.openxmlformats.org/drawingml/2006/main"/>
@@ -1899,7 +1899,7 @@
           <p:nvPr/>
         </p:nvPicPr>
         <p:blipFill rotWithShape="1">
-          <a:blip xmlns:r="http://schemas.openxmlformats.org/officeDocument/2006/relationships" xmlns:a="http://schemas.openxmlformats.org/drawingml/2006/main" r:embed="R0bdbecfc032c410c">
+          <a:blip xmlns:r="http://schemas.openxmlformats.org/officeDocument/2006/relationships" xmlns:a="http://schemas.openxmlformats.org/drawingml/2006/main" r:embed="R6cf20806e53349c4">
             <a:alphaModFix amt="28000"/>
           </a:blip>
           <a:stretch xmlns:a="http://schemas.openxmlformats.org/drawingml/2006/main"/>
@@ -2176,7 +2176,7 @@
           <p:nvPr/>
         </p:nvPicPr>
         <p:blipFill rotWithShape="1">
-          <a:blip xmlns:r="http://schemas.openxmlformats.org/officeDocument/2006/relationships" xmlns:a="http://schemas.openxmlformats.org/drawingml/2006/main" r:embed="Ree4edb3652564786">
+          <a:blip xmlns:r="http://schemas.openxmlformats.org/officeDocument/2006/relationships" xmlns:a="http://schemas.openxmlformats.org/drawingml/2006/main" r:embed="Rb51b63aae5c247dc">
             <a:alphaModFix amt="28000"/>
           </a:blip>
           <a:stretch xmlns:a="http://schemas.openxmlformats.org/drawingml/2006/main"/>
@@ -2451,7 +2451,7 @@
           <p:nvPr/>
         </p:nvPicPr>
         <p:blipFill rotWithShape="1">
-          <a:blip xmlns:r="http://schemas.openxmlformats.org/officeDocument/2006/relationships" xmlns:a="http://schemas.openxmlformats.org/drawingml/2006/main" r:embed="R1892610391914745">
+          <a:blip xmlns:r="http://schemas.openxmlformats.org/officeDocument/2006/relationships" xmlns:a="http://schemas.openxmlformats.org/drawingml/2006/main" r:embed="Rf0c5589261a64a91">
             <a:alphaModFix amt="28000"/>
           </a:blip>
           <a:stretch xmlns:a="http://schemas.openxmlformats.org/drawingml/2006/main"/>
@@ -2875,7 +2875,7 @@
           <p:nvPr/>
         </p:nvPicPr>
         <p:blipFill rotWithShape="1">
-          <a:blip xmlns:r="http://schemas.openxmlformats.org/officeDocument/2006/relationships" xmlns:a="http://schemas.openxmlformats.org/drawingml/2006/main" r:embed="Re78a707cf1b54a2d">
+          <a:blip xmlns:r="http://schemas.openxmlformats.org/officeDocument/2006/relationships" xmlns:a="http://schemas.openxmlformats.org/drawingml/2006/main" r:embed="Rf52208536905457f">
             <a:alphaModFix amt="28000"/>
           </a:blip>
           <a:stretch xmlns:a="http://schemas.openxmlformats.org/drawingml/2006/main"/>
@@ -3016,7 +3016,7 @@
           <p:nvPr/>
         </p:nvPicPr>
         <p:blipFill rotWithShape="1">
-          <a:blip xmlns:r="http://schemas.openxmlformats.org/officeDocument/2006/relationships" xmlns:a="http://schemas.openxmlformats.org/drawingml/2006/main" r:embed="R1f66b078b37f4c5d">
+          <a:blip xmlns:r="http://schemas.openxmlformats.org/officeDocument/2006/relationships" xmlns:a="http://schemas.openxmlformats.org/drawingml/2006/main" r:embed="R76c3299b2b5f40f1">
             <a:alphaModFix amt="28000"/>
           </a:blip>
           <a:stretch xmlns:a="http://schemas.openxmlformats.org/drawingml/2006/main"/>
@@ -3130,7 +3130,7 @@
           <p:nvPr/>
         </p:nvPicPr>
         <p:blipFill rotWithShape="1">
-          <a:blip xmlns:r="http://schemas.openxmlformats.org/officeDocument/2006/relationships" xmlns:a="http://schemas.openxmlformats.org/drawingml/2006/main" r:embed="Rc074b0a02cf24b05">
+          <a:blip xmlns:r="http://schemas.openxmlformats.org/officeDocument/2006/relationships" xmlns:a="http://schemas.openxmlformats.org/drawingml/2006/main" r:embed="Rd7826bc02dfd4bf0">
             <a:alphaModFix amt="28000"/>
           </a:blip>
           <a:stretch xmlns:a="http://schemas.openxmlformats.org/drawingml/2006/main"/>
@@ -3457,7 +3457,7 @@
           <p:nvPr/>
         </p:nvPicPr>
         <p:blipFill rotWithShape="1">
-          <a:blip xmlns:r="http://schemas.openxmlformats.org/officeDocument/2006/relationships" xmlns:a="http://schemas.openxmlformats.org/drawingml/2006/main" r:embed="R78ac02d741384b1f">
+          <a:blip xmlns:r="http://schemas.openxmlformats.org/officeDocument/2006/relationships" xmlns:a="http://schemas.openxmlformats.org/drawingml/2006/main" r:embed="R3a421a2803d54593">
             <a:alphaModFix amt="28000"/>
           </a:blip>
           <a:stretch xmlns:a="http://schemas.openxmlformats.org/drawingml/2006/main"/>
@@ -3745,7 +3745,7 @@
           <p:nvPr/>
         </p:nvPicPr>
         <p:blipFill rotWithShape="1">
-          <a:blip xmlns:r="http://schemas.openxmlformats.org/officeDocument/2006/relationships" xmlns:a="http://schemas.openxmlformats.org/drawingml/2006/main" r:embed="R97ee8358a82f4c4b">
+          <a:blip xmlns:r="http://schemas.openxmlformats.org/officeDocument/2006/relationships" xmlns:a="http://schemas.openxmlformats.org/drawingml/2006/main" r:embed="R731161a9e5314308">
             <a:alphaModFix amt="28000"/>
           </a:blip>
           <a:stretch xmlns:a="http://schemas.openxmlformats.org/drawingml/2006/main"/>
@@ -3982,17 +3982,17 @@
   </p:cSld>
   <p:clrMap bg1="lt1" tx1="dk1" bg2="lt2" tx2="dk2" accent1="accent1" accent2="accent2" accent3="accent3" accent4="accent4" accent5="accent5" accent6="accent6" hlink="hlink" folHlink="folHlink"/>
   <p:sldLayoutIdLst>
-    <p:sldLayoutId xmlns:r="http://schemas.openxmlformats.org/officeDocument/2006/relationships" id="2147483649" r:id="Ra582d7505673493d"/>
-    <p:sldLayoutId xmlns:r="http://schemas.openxmlformats.org/officeDocument/2006/relationships" id="2147483650" r:id="Rd6023700a97a4924"/>
-    <p:sldLayoutId xmlns:r="http://schemas.openxmlformats.org/officeDocument/2006/relationships" id="2147483651" r:id="R45a929a8638745b6"/>
-    <p:sldLayoutId xmlns:r="http://schemas.openxmlformats.org/officeDocument/2006/relationships" id="2147483652" r:id="Rb43080b9b70e4958"/>
-    <p:sldLayoutId xmlns:r="http://schemas.openxmlformats.org/officeDocument/2006/relationships" id="2147483653" r:id="R5a2ca7cf70b14c9b"/>
-    <p:sldLayoutId xmlns:r="http://schemas.openxmlformats.org/officeDocument/2006/relationships" id="2147483654" r:id="R3fff0a0437fc43a2"/>
-    <p:sldLayoutId xmlns:r="http://schemas.openxmlformats.org/officeDocument/2006/relationships" id="2147483655" r:id="R985625b95cb24e75"/>
-    <p:sldLayoutId xmlns:r="http://schemas.openxmlformats.org/officeDocument/2006/relationships" id="2147483656" r:id="Rd76506ccedb24ab3"/>
-    <p:sldLayoutId xmlns:r="http://schemas.openxmlformats.org/officeDocument/2006/relationships" id="2147483657" r:id="R80837aa00cfd4d7e"/>
-    <p:sldLayoutId xmlns:r="http://schemas.openxmlformats.org/officeDocument/2006/relationships" id="2147483658" r:id="R05cf2449b4714209"/>
-    <p:sldLayoutId xmlns:r="http://schemas.openxmlformats.org/officeDocument/2006/relationships" id="2147483659" r:id="Rfd02cdaa62324e18"/>
+    <p:sldLayoutId xmlns:r="http://schemas.openxmlformats.org/officeDocument/2006/relationships" id="2147483649" r:id="R760ecd3f12504350"/>
+    <p:sldLayoutId xmlns:r="http://schemas.openxmlformats.org/officeDocument/2006/relationships" id="2147483650" r:id="R0addfcee147f4d79"/>
+    <p:sldLayoutId xmlns:r="http://schemas.openxmlformats.org/officeDocument/2006/relationships" id="2147483651" r:id="Ra333d94bdb874e88"/>
+    <p:sldLayoutId xmlns:r="http://schemas.openxmlformats.org/officeDocument/2006/relationships" id="2147483652" r:id="Rd43ab1b80b6a4750"/>
+    <p:sldLayoutId xmlns:r="http://schemas.openxmlformats.org/officeDocument/2006/relationships" id="2147483653" r:id="Rf139ed402453401e"/>
+    <p:sldLayoutId xmlns:r="http://schemas.openxmlformats.org/officeDocument/2006/relationships" id="2147483654" r:id="R1e33a026339244ab"/>
+    <p:sldLayoutId xmlns:r="http://schemas.openxmlformats.org/officeDocument/2006/relationships" id="2147483655" r:id="R3b74a418aabc4365"/>
+    <p:sldLayoutId xmlns:r="http://schemas.openxmlformats.org/officeDocument/2006/relationships" id="2147483656" r:id="R39a5ea8e20be4bfe"/>
+    <p:sldLayoutId xmlns:r="http://schemas.openxmlformats.org/officeDocument/2006/relationships" id="2147483657" r:id="R3336aab8de594645"/>
+    <p:sldLayoutId xmlns:r="http://schemas.openxmlformats.org/officeDocument/2006/relationships" id="2147483658" r:id="R59b80860632f404b"/>
+    <p:sldLayoutId xmlns:r="http://schemas.openxmlformats.org/officeDocument/2006/relationships" id="2147483659" r:id="R52908e967f5b4f3d"/>
   </p:sldLayoutIdLst>
   <p:hf hdr="0" ftr="0" dt="0"/>
   <p:txStyles>
@@ -7489,7 +7489,51 @@
                 <a:ea typeface="Calibri"/>
                 <a:cs typeface="Calibri"/>
               </a:rPr>
-              <a:t>Store 2 as a non-zero secret number, divide the user's sum by it, and display the new total.</a:t>
+              <a:t>Store 2 in a variable called [divisor]. Divide [total] by [divisor] and store the result in [divided_total]. Display </a:t>
+            </a:r>
+            <a:r>
+              <a:rPr sz="2400" b="0">
+                <a:solidFill>
+                  <a:srgbClr val="067D17"/>
+                </a:solidFill>
+                <a:latin typeface="JetBrains Mono"/>
+                <a:ea typeface="JetBrains Mono"/>
+                <a:cs typeface="JetBrains Mono"/>
+              </a:rPr>
+              <a:t>"Divided total:"</a:t>
+            </a:r>
+            <a:r>
+              <a:rPr sz="2400" b="0">
+                <a:solidFill>
+                  <a:srgbClr val="080808"/>
+                </a:solidFill>
+                <a:latin typeface="Calibri"/>
+                <a:ea typeface="Calibri"/>
+                <a:cs typeface="Calibri"/>
+              </a:rPr>
+              <a:t> followed by [divided_total]. Test inputs 8 and 4; the output must include </a:t>
+            </a:r>
+            <a:r>
+              <a:rPr sz="2400" b="0">
+                <a:solidFill>
+                  <a:srgbClr val="067D17"/>
+                </a:solidFill>
+                <a:latin typeface="JetBrains Mono"/>
+                <a:ea typeface="JetBrains Mono"/>
+                <a:cs typeface="JetBrains Mono"/>
+              </a:rPr>
+              <a:t>"Divided total: 6.0"</a:t>
+            </a:r>
+            <a:r>
+              <a:rPr sz="2400" b="0">
+                <a:solidFill>
+                  <a:srgbClr val="080808"/>
+                </a:solidFill>
+                <a:latin typeface="Calibri"/>
+                <a:ea typeface="Calibri"/>
+                <a:cs typeface="Calibri"/>
+              </a:rPr>
+              <a:t>.</a:t>
             </a:r>
           </a:p>
         </p:txBody>

--- a/Mapped Curriculum Lessons/Grade 6/Lesson 02 - Operators and Integers/Operators and Integers - Slides.pptx
+++ b/Mapped Curriculum Lessons/Grade 6/Lesson 02 - Operators and Integers/Operators and Integers - Slides.pptx
@@ -2,28 +2,28 @@
 <file path=ppt/presentation.xml><?xml version="1.0" encoding="utf-8"?>
 <p:presentation xmlns:p="http://schemas.openxmlformats.org/presentationml/2006/main" embedTrueTypeFonts="1" saveSubsetFonts="0">
   <p:sldMasterIdLst>
-    <p:sldMasterId xmlns:r="http://schemas.openxmlformats.org/officeDocument/2006/relationships" id="2147483648" r:id="R1827c3174bbf4eae"/>
+    <p:sldMasterId xmlns:r="http://schemas.openxmlformats.org/officeDocument/2006/relationships" id="2147483648" r:id="R64232dd7ae2a4ea3"/>
   </p:sldMasterIdLst>
   <p:notesMasterIdLst>
-    <p:notesMasterId xmlns:r="http://schemas.openxmlformats.org/officeDocument/2006/relationships" r:id="R6be40343a123419d"/>
+    <p:notesMasterId xmlns:r="http://schemas.openxmlformats.org/officeDocument/2006/relationships" r:id="R6779c5632897455d"/>
   </p:notesMasterIdLst>
   <p:sldIdLst>
-    <p:sldId xmlns:r="http://schemas.openxmlformats.org/officeDocument/2006/relationships" id="256" r:id="R4bb6228ccace431a"/>
-    <p:sldId xmlns:r="http://schemas.openxmlformats.org/officeDocument/2006/relationships" id="257" r:id="Rbf04087797af4fe5"/>
-    <p:sldId xmlns:r="http://schemas.openxmlformats.org/officeDocument/2006/relationships" id="258" r:id="R6090084b11334921"/>
-    <p:sldId xmlns:r="http://schemas.openxmlformats.org/officeDocument/2006/relationships" id="259" r:id="R0ef2dc672e774d4e"/>
-    <p:sldId xmlns:r="http://schemas.openxmlformats.org/officeDocument/2006/relationships" id="260" r:id="Rdf28f446180343b1"/>
-    <p:sldId xmlns:r="http://schemas.openxmlformats.org/officeDocument/2006/relationships" id="261" r:id="Rddf5f64b1ba34120"/>
-    <p:sldId xmlns:r="http://schemas.openxmlformats.org/officeDocument/2006/relationships" id="262" r:id="R3b73ce09333c48d6"/>
-    <p:sldId xmlns:r="http://schemas.openxmlformats.org/officeDocument/2006/relationships" id="263" r:id="R834e0bbad4e14102"/>
-    <p:sldId xmlns:r="http://schemas.openxmlformats.org/officeDocument/2006/relationships" id="264" r:id="Rd5c88502b7594c82"/>
+    <p:sldId xmlns:r="http://schemas.openxmlformats.org/officeDocument/2006/relationships" id="256" r:id="R35a43c6a7f1a41cc"/>
+    <p:sldId xmlns:r="http://schemas.openxmlformats.org/officeDocument/2006/relationships" id="257" r:id="R353ebf3edb524cc5"/>
+    <p:sldId xmlns:r="http://schemas.openxmlformats.org/officeDocument/2006/relationships" id="258" r:id="Rd4c1f8b23dcf4537"/>
+    <p:sldId xmlns:r="http://schemas.openxmlformats.org/officeDocument/2006/relationships" id="259" r:id="R0de29b7fc3994b35"/>
+    <p:sldId xmlns:r="http://schemas.openxmlformats.org/officeDocument/2006/relationships" id="260" r:id="R361056bd852f4c3d"/>
+    <p:sldId xmlns:r="http://schemas.openxmlformats.org/officeDocument/2006/relationships" id="261" r:id="R38d7c304cb42466a"/>
+    <p:sldId xmlns:r="http://schemas.openxmlformats.org/officeDocument/2006/relationships" id="262" r:id="R5100f683eee244d8"/>
+    <p:sldId xmlns:r="http://schemas.openxmlformats.org/officeDocument/2006/relationships" id="263" r:id="R3bb9b36c8789478b"/>
+    <p:sldId xmlns:r="http://schemas.openxmlformats.org/officeDocument/2006/relationships" id="264" r:id="R62b23c7544b54d9e"/>
   </p:sldIdLst>
   <p:sldSz cx="12192000" cy="6858000"/>
   <p:notesSz cx="6858000" cy="9144000"/>
   <p:embeddedFontLst>
     <p:embeddedFont>
       <p:font typeface="JetBrains Mono"/>
-      <p:regular xmlns:r="http://schemas.openxmlformats.org/officeDocument/2006/relationships" r:id="Rdc5e42f902cd47a8"/>
+      <p:regular xmlns:r="http://schemas.openxmlformats.org/officeDocument/2006/relationships" r:id="Rf1a563c8fbc6463a"/>
     </p:embeddedFont>
   </p:embeddedFontLst>
 </p:presentation>
@@ -1071,7 +1071,7 @@
           <p:nvPr/>
         </p:nvPicPr>
         <p:blipFill rotWithShape="1">
-          <a:blip xmlns:r="http://schemas.openxmlformats.org/officeDocument/2006/relationships" xmlns:a="http://schemas.openxmlformats.org/drawingml/2006/main" r:embed="R5f6eb561c3ef4c00"/>
+          <a:blip xmlns:r="http://schemas.openxmlformats.org/officeDocument/2006/relationships" xmlns:a="http://schemas.openxmlformats.org/drawingml/2006/main" r:embed="Re88f197cf4384f2d"/>
           <a:stretch xmlns:a="http://schemas.openxmlformats.org/drawingml/2006/main"/>
         </p:blipFill>
         <p:spPr>
@@ -1451,7 +1451,7 @@
           <p:nvPr/>
         </p:nvPicPr>
         <p:blipFill rotWithShape="1">
-          <a:blip xmlns:r="http://schemas.openxmlformats.org/officeDocument/2006/relationships" xmlns:a="http://schemas.openxmlformats.org/drawingml/2006/main" r:embed="R8855886de636419a">
+          <a:blip xmlns:r="http://schemas.openxmlformats.org/officeDocument/2006/relationships" xmlns:a="http://schemas.openxmlformats.org/drawingml/2006/main" r:embed="Rb5615a3366ce4e1a">
             <a:alphaModFix amt="28000"/>
           </a:blip>
           <a:stretch xmlns:a="http://schemas.openxmlformats.org/drawingml/2006/main"/>
@@ -1664,7 +1664,7 @@
           <p:nvPr/>
         </p:nvPicPr>
         <p:blipFill rotWithShape="1">
-          <a:blip xmlns:r="http://schemas.openxmlformats.org/officeDocument/2006/relationships" xmlns:a="http://schemas.openxmlformats.org/drawingml/2006/main" r:embed="R626f5cdd0e3f4f90">
+          <a:blip xmlns:r="http://schemas.openxmlformats.org/officeDocument/2006/relationships" xmlns:a="http://schemas.openxmlformats.org/drawingml/2006/main" r:embed="Raf0a52aa1ccb43c0">
             <a:alphaModFix amt="28000"/>
           </a:blip>
           <a:stretch xmlns:a="http://schemas.openxmlformats.org/drawingml/2006/main"/>
@@ -1899,7 +1899,7 @@
           <p:nvPr/>
         </p:nvPicPr>
         <p:blipFill rotWithShape="1">
-          <a:blip xmlns:r="http://schemas.openxmlformats.org/officeDocument/2006/relationships" xmlns:a="http://schemas.openxmlformats.org/drawingml/2006/main" r:embed="R6cf20806e53349c4">
+          <a:blip xmlns:r="http://schemas.openxmlformats.org/officeDocument/2006/relationships" xmlns:a="http://schemas.openxmlformats.org/drawingml/2006/main" r:embed="R96355a79b9fb48bd">
             <a:alphaModFix amt="28000"/>
           </a:blip>
           <a:stretch xmlns:a="http://schemas.openxmlformats.org/drawingml/2006/main"/>
@@ -2176,7 +2176,7 @@
           <p:nvPr/>
         </p:nvPicPr>
         <p:blipFill rotWithShape="1">
-          <a:blip xmlns:r="http://schemas.openxmlformats.org/officeDocument/2006/relationships" xmlns:a="http://schemas.openxmlformats.org/drawingml/2006/main" r:embed="Rb51b63aae5c247dc">
+          <a:blip xmlns:r="http://schemas.openxmlformats.org/officeDocument/2006/relationships" xmlns:a="http://schemas.openxmlformats.org/drawingml/2006/main" r:embed="R7bf1fa35ac5d446b">
             <a:alphaModFix amt="28000"/>
           </a:blip>
           <a:stretch xmlns:a="http://schemas.openxmlformats.org/drawingml/2006/main"/>
@@ -2451,7 +2451,7 @@
           <p:nvPr/>
         </p:nvPicPr>
         <p:blipFill rotWithShape="1">
-          <a:blip xmlns:r="http://schemas.openxmlformats.org/officeDocument/2006/relationships" xmlns:a="http://schemas.openxmlformats.org/drawingml/2006/main" r:embed="Rf0c5589261a64a91">
+          <a:blip xmlns:r="http://schemas.openxmlformats.org/officeDocument/2006/relationships" xmlns:a="http://schemas.openxmlformats.org/drawingml/2006/main" r:embed="R9ba483acce324b58">
             <a:alphaModFix amt="28000"/>
           </a:blip>
           <a:stretch xmlns:a="http://schemas.openxmlformats.org/drawingml/2006/main"/>
@@ -2875,7 +2875,7 @@
           <p:nvPr/>
         </p:nvPicPr>
         <p:blipFill rotWithShape="1">
-          <a:blip xmlns:r="http://schemas.openxmlformats.org/officeDocument/2006/relationships" xmlns:a="http://schemas.openxmlformats.org/drawingml/2006/main" r:embed="Rf52208536905457f">
+          <a:blip xmlns:r="http://schemas.openxmlformats.org/officeDocument/2006/relationships" xmlns:a="http://schemas.openxmlformats.org/drawingml/2006/main" r:embed="R87a895f6355f418c">
             <a:alphaModFix amt="28000"/>
           </a:blip>
           <a:stretch xmlns:a="http://schemas.openxmlformats.org/drawingml/2006/main"/>
@@ -3016,7 +3016,7 @@
           <p:nvPr/>
         </p:nvPicPr>
         <p:blipFill rotWithShape="1">
-          <a:blip xmlns:r="http://schemas.openxmlformats.org/officeDocument/2006/relationships" xmlns:a="http://schemas.openxmlformats.org/drawingml/2006/main" r:embed="R76c3299b2b5f40f1">
+          <a:blip xmlns:r="http://schemas.openxmlformats.org/officeDocument/2006/relationships" xmlns:a="http://schemas.openxmlformats.org/drawingml/2006/main" r:embed="R760e37e9b29b43e9">
             <a:alphaModFix amt="28000"/>
           </a:blip>
           <a:stretch xmlns:a="http://schemas.openxmlformats.org/drawingml/2006/main"/>
@@ -3130,7 +3130,7 @@
           <p:nvPr/>
         </p:nvPicPr>
         <p:blipFill rotWithShape="1">
-          <a:blip xmlns:r="http://schemas.openxmlformats.org/officeDocument/2006/relationships" xmlns:a="http://schemas.openxmlformats.org/drawingml/2006/main" r:embed="Rd7826bc02dfd4bf0">
+          <a:blip xmlns:r="http://schemas.openxmlformats.org/officeDocument/2006/relationships" xmlns:a="http://schemas.openxmlformats.org/drawingml/2006/main" r:embed="Raa1179477c25433d">
             <a:alphaModFix amt="28000"/>
           </a:blip>
           <a:stretch xmlns:a="http://schemas.openxmlformats.org/drawingml/2006/main"/>
@@ -3457,7 +3457,7 @@
           <p:nvPr/>
         </p:nvPicPr>
         <p:blipFill rotWithShape="1">
-          <a:blip xmlns:r="http://schemas.openxmlformats.org/officeDocument/2006/relationships" xmlns:a="http://schemas.openxmlformats.org/drawingml/2006/main" r:embed="R3a421a2803d54593">
+          <a:blip xmlns:r="http://schemas.openxmlformats.org/officeDocument/2006/relationships" xmlns:a="http://schemas.openxmlformats.org/drawingml/2006/main" r:embed="Rb14db22299374c64">
             <a:alphaModFix amt="28000"/>
           </a:blip>
           <a:stretch xmlns:a="http://schemas.openxmlformats.org/drawingml/2006/main"/>
@@ -3745,7 +3745,7 @@
           <p:nvPr/>
         </p:nvPicPr>
         <p:blipFill rotWithShape="1">
-          <a:blip xmlns:r="http://schemas.openxmlformats.org/officeDocument/2006/relationships" xmlns:a="http://schemas.openxmlformats.org/drawingml/2006/main" r:embed="R731161a9e5314308">
+          <a:blip xmlns:r="http://schemas.openxmlformats.org/officeDocument/2006/relationships" xmlns:a="http://schemas.openxmlformats.org/drawingml/2006/main" r:embed="Rd3affc281873430c">
             <a:alphaModFix amt="28000"/>
           </a:blip>
           <a:stretch xmlns:a="http://schemas.openxmlformats.org/drawingml/2006/main"/>
@@ -3982,17 +3982,17 @@
   </p:cSld>
   <p:clrMap bg1="lt1" tx1="dk1" bg2="lt2" tx2="dk2" accent1="accent1" accent2="accent2" accent3="accent3" accent4="accent4" accent5="accent5" accent6="accent6" hlink="hlink" folHlink="folHlink"/>
   <p:sldLayoutIdLst>
-    <p:sldLayoutId xmlns:r="http://schemas.openxmlformats.org/officeDocument/2006/relationships" id="2147483649" r:id="R760ecd3f12504350"/>
-    <p:sldLayoutId xmlns:r="http://schemas.openxmlformats.org/officeDocument/2006/relationships" id="2147483650" r:id="R0addfcee147f4d79"/>
-    <p:sldLayoutId xmlns:r="http://schemas.openxmlformats.org/officeDocument/2006/relationships" id="2147483651" r:id="Ra333d94bdb874e88"/>
-    <p:sldLayoutId xmlns:r="http://schemas.openxmlformats.org/officeDocument/2006/relationships" id="2147483652" r:id="Rd43ab1b80b6a4750"/>
-    <p:sldLayoutId xmlns:r="http://schemas.openxmlformats.org/officeDocument/2006/relationships" id="2147483653" r:id="Rf139ed402453401e"/>
-    <p:sldLayoutId xmlns:r="http://schemas.openxmlformats.org/officeDocument/2006/relationships" id="2147483654" r:id="R1e33a026339244ab"/>
-    <p:sldLayoutId xmlns:r="http://schemas.openxmlformats.org/officeDocument/2006/relationships" id="2147483655" r:id="R3b74a418aabc4365"/>
-    <p:sldLayoutId xmlns:r="http://schemas.openxmlformats.org/officeDocument/2006/relationships" id="2147483656" r:id="R39a5ea8e20be4bfe"/>
-    <p:sldLayoutId xmlns:r="http://schemas.openxmlformats.org/officeDocument/2006/relationships" id="2147483657" r:id="R3336aab8de594645"/>
-    <p:sldLayoutId xmlns:r="http://schemas.openxmlformats.org/officeDocument/2006/relationships" id="2147483658" r:id="R59b80860632f404b"/>
-    <p:sldLayoutId xmlns:r="http://schemas.openxmlformats.org/officeDocument/2006/relationships" id="2147483659" r:id="R52908e967f5b4f3d"/>
+    <p:sldLayoutId xmlns:r="http://schemas.openxmlformats.org/officeDocument/2006/relationships" id="2147483649" r:id="Rb1d5ca94d5e94549"/>
+    <p:sldLayoutId xmlns:r="http://schemas.openxmlformats.org/officeDocument/2006/relationships" id="2147483650" r:id="Rebcbf3d97eff48ae"/>
+    <p:sldLayoutId xmlns:r="http://schemas.openxmlformats.org/officeDocument/2006/relationships" id="2147483651" r:id="R41e771290e914d35"/>
+    <p:sldLayoutId xmlns:r="http://schemas.openxmlformats.org/officeDocument/2006/relationships" id="2147483652" r:id="R9566bdd4cbcb4744"/>
+    <p:sldLayoutId xmlns:r="http://schemas.openxmlformats.org/officeDocument/2006/relationships" id="2147483653" r:id="R3024646b090b4d38"/>
+    <p:sldLayoutId xmlns:r="http://schemas.openxmlformats.org/officeDocument/2006/relationships" id="2147483654" r:id="Re9b240879d24468f"/>
+    <p:sldLayoutId xmlns:r="http://schemas.openxmlformats.org/officeDocument/2006/relationships" id="2147483655" r:id="R9ba6e6735aee4967"/>
+    <p:sldLayoutId xmlns:r="http://schemas.openxmlformats.org/officeDocument/2006/relationships" id="2147483656" r:id="Rf51d6fdad86b47d4"/>
+    <p:sldLayoutId xmlns:r="http://schemas.openxmlformats.org/officeDocument/2006/relationships" id="2147483657" r:id="Ra8a02063ef06417c"/>
+    <p:sldLayoutId xmlns:r="http://schemas.openxmlformats.org/officeDocument/2006/relationships" id="2147483658" r:id="Rc77ece3ea0af4000"/>
+    <p:sldLayoutId xmlns:r="http://schemas.openxmlformats.org/officeDocument/2006/relationships" id="2147483659" r:id="Rf3302bd250b449cf"/>
   </p:sldLayoutIdLst>
   <p:hf hdr="0" ftr="0" dt="0"/>
   <p:txStyles>
@@ -6899,18 +6899,21 @@
                 <a:ea typeface="Calibri"/>
                 <a:cs typeface="Calibri"/>
               </a:rPr>
-              <a:t>Ask for two whole numbers, convert both with </a:t>
-            </a:r>
-            <a:r>
-              <a:rPr sz="2400" b="0">
-                <a:solidFill>
-                  <a:srgbClr val="1750EB"/>
-                </a:solidFill>
-                <a:latin typeface="JetBrains Mono"/>
-                <a:ea typeface="JetBrains Mono"/>
-                <a:cs typeface="JetBrains Mono"/>
-              </a:rPr>
-              <a:t>int()</a:t>
+              <a:t>Change the example so </a:t>
+            </a:r>
+            <a:r>
+              <a:rPr sz="2050" b="0">
+                <a:solidFill>
+                  <a:srgbClr val="6A1B9A"/>
+                </a:solidFill>
+                <a:highlight>
+                  <a:srgbClr val="ECEAF4"/>
+                </a:highlight>
+                <a:latin typeface="JetBrains Mono"/>
+                <a:ea typeface="JetBrains Mono"/>
+                <a:cs typeface="JetBrains Mono"/>
+              </a:rPr>
+              <a:t> num1 </a:t>
             </a:r>
             <a:r>
               <a:rPr sz="2400" b="0">
@@ -6921,7 +6924,51 @@
                 <a:ea typeface="Calibri"/>
                 <a:cs typeface="Calibri"/>
               </a:rPr>
-              <a:t>, and display their sum.</a:t>
+              <a:t> comes from the user instead of the fixed value 12. Use </a:t>
+            </a:r>
+            <a:r>
+              <a:rPr sz="2050" b="0">
+                <a:solidFill>
+                  <a:srgbClr val="1750EB"/>
+                </a:solidFill>
+                <a:latin typeface="JetBrains Mono"/>
+                <a:ea typeface="JetBrains Mono"/>
+                <a:cs typeface="JetBrains Mono"/>
+              </a:rPr>
+              <a:t>int()</a:t>
+            </a:r>
+            <a:r>
+              <a:rPr sz="2400" b="0">
+                <a:solidFill>
+                  <a:srgbClr val="080808"/>
+                </a:solidFill>
+                <a:latin typeface="Calibri"/>
+                <a:ea typeface="Calibri"/>
+                <a:cs typeface="Calibri"/>
+              </a:rPr>
+              <a:t> to convert the input to a whole number. For example, 8 and 4 display </a:t>
+            </a:r>
+            <a:r>
+              <a:rPr sz="2050" b="0">
+                <a:solidFill>
+                  <a:srgbClr val="067D17"/>
+                </a:solidFill>
+                <a:latin typeface="JetBrains Mono"/>
+                <a:ea typeface="JetBrains Mono"/>
+                <a:cs typeface="JetBrains Mono"/>
+              </a:rPr>
+              <a:t>"Total: 12"</a:t>
+            </a:r>
+            <a:r>
+              <a:rPr sz="2400" b="0">
+                <a:solidFill>
+                  <a:srgbClr val="080808"/>
+                </a:solidFill>
+                <a:latin typeface="Calibri"/>
+                <a:ea typeface="Calibri"/>
+                <a:cs typeface="Calibri"/>
+              </a:rPr>
+              <a:t>.</a:t>
             </a:r>
           </a:p>
         </p:txBody>
@@ -7489,18 +7536,21 @@
                 <a:ea typeface="Calibri"/>
                 <a:cs typeface="Calibri"/>
               </a:rPr>
-              <a:t>Store 2 in a variable called [divisor]. Divide [total] by [divisor] and store the result in [divided_total]. Display </a:t>
-            </a:r>
-            <a:r>
-              <a:rPr sz="2400" b="0">
-                <a:solidFill>
-                  <a:srgbClr val="067D17"/>
-                </a:solidFill>
-                <a:latin typeface="JetBrains Mono"/>
-                <a:ea typeface="JetBrains Mono"/>
-                <a:cs typeface="JetBrains Mono"/>
-              </a:rPr>
-              <a:t>"Divided total:"</a:t>
+              <a:t>Extend your Challenge 1 program. Ask how many people will share </a:t>
+            </a:r>
+            <a:r>
+              <a:rPr sz="2050" b="0">
+                <a:solidFill>
+                  <a:srgbClr val="6A1B9A"/>
+                </a:solidFill>
+                <a:highlight>
+                  <a:srgbClr val="ECEAF4"/>
+                </a:highlight>
+                <a:latin typeface="JetBrains Mono"/>
+                <a:ea typeface="JetBrains Mono"/>
+                <a:cs typeface="JetBrains Mono"/>
+              </a:rPr>
+              <a:t> total </a:t>
             </a:r>
             <a:r>
               <a:rPr sz="2400" b="0">
@@ -7511,18 +7561,115 @@
                 <a:ea typeface="Calibri"/>
                 <a:cs typeface="Calibri"/>
               </a:rPr>
-              <a:t> followed by [divided_total]. Test inputs 8 and 4; the output must include </a:t>
+              <a:t> and store the whole number in </a:t>
+            </a:r>
+            <a:r>
+              <a:rPr sz="2050" b="0">
+                <a:solidFill>
+                  <a:srgbClr val="6A1B9A"/>
+                </a:solidFill>
+                <a:highlight>
+                  <a:srgbClr val="ECEAF4"/>
+                </a:highlight>
+                <a:latin typeface="JetBrains Mono"/>
+                <a:ea typeface="JetBrains Mono"/>
+                <a:cs typeface="JetBrains Mono"/>
+              </a:rPr>
+              <a:t> people </a:t>
             </a:r>
             <a:r>
               <a:rPr sz="2400" b="0">
                 <a:solidFill>
+                  <a:srgbClr val="080808"/>
+                </a:solidFill>
+                <a:latin typeface="Calibri"/>
+                <a:ea typeface="Calibri"/>
+                <a:cs typeface="Calibri"/>
+              </a:rPr>
+              <a:t>. Divide </a:t>
+            </a:r>
+            <a:r>
+              <a:rPr sz="2050" b="0">
+                <a:solidFill>
+                  <a:srgbClr val="6A1B9A"/>
+                </a:solidFill>
+                <a:highlight>
+                  <a:srgbClr val="ECEAF4"/>
+                </a:highlight>
+                <a:latin typeface="JetBrains Mono"/>
+                <a:ea typeface="JetBrains Mono"/>
+                <a:cs typeface="JetBrains Mono"/>
+              </a:rPr>
+              <a:t> total </a:t>
+            </a:r>
+            <a:r>
+              <a:rPr sz="2400" b="0">
+                <a:solidFill>
+                  <a:srgbClr val="080808"/>
+                </a:solidFill>
+                <a:latin typeface="Calibri"/>
+                <a:ea typeface="Calibri"/>
+                <a:cs typeface="Calibri"/>
+              </a:rPr>
+              <a:t> by </a:t>
+            </a:r>
+            <a:r>
+              <a:rPr sz="2050" b="0">
+                <a:solidFill>
+                  <a:srgbClr val="6A1B9A"/>
+                </a:solidFill>
+                <a:highlight>
+                  <a:srgbClr val="ECEAF4"/>
+                </a:highlight>
+                <a:latin typeface="JetBrains Mono"/>
+                <a:ea typeface="JetBrains Mono"/>
+                <a:cs typeface="JetBrains Mono"/>
+              </a:rPr>
+              <a:t> people </a:t>
+            </a:r>
+            <a:r>
+              <a:rPr sz="2400" b="0">
+                <a:solidFill>
+                  <a:srgbClr val="080808"/>
+                </a:solidFill>
+                <a:latin typeface="Calibri"/>
+                <a:ea typeface="Calibri"/>
+                <a:cs typeface="Calibri"/>
+              </a:rPr>
+              <a:t> and display </a:t>
+            </a:r>
+            <a:r>
+              <a:rPr sz="2050" b="0">
+                <a:solidFill>
                   <a:srgbClr val="067D17"/>
                 </a:solidFill>
                 <a:latin typeface="JetBrains Mono"/>
                 <a:ea typeface="JetBrains Mono"/>
                 <a:cs typeface="JetBrains Mono"/>
               </a:rPr>
-              <a:t>"Divided total: 6.0"</a:t>
+              <a:t>"Each share:"</a:t>
+            </a:r>
+            <a:r>
+              <a:rPr sz="2400" b="0">
+                <a:solidFill>
+                  <a:srgbClr val="080808"/>
+                </a:solidFill>
+                <a:latin typeface="Calibri"/>
+                <a:ea typeface="Calibri"/>
+                <a:cs typeface="Calibri"/>
+              </a:rPr>
+              <a:t> followed by the result. For example, 8, 4 and 3 display </a:t>
+            </a:r>
+            <a:r>
+              <a:rPr sz="2050" b="0">
+                <a:solidFill>
+                  <a:srgbClr val="067D17"/>
+                </a:solidFill>
+                <a:latin typeface="JetBrains Mono"/>
+                <a:ea typeface="JetBrains Mono"/>
+                <a:cs typeface="JetBrains Mono"/>
+              </a:rPr>
+              <a:t>"Each share: 4.0"</a:t>
             </a:r>
             <a:r>
               <a:rPr sz="2400" b="0">
@@ -7815,7 +7962,73 @@
                 <a:ea typeface="JetBrains Mono"/>
                 <a:cs typeface="JetBrains Mono"/>
               </a:rPr>
-              <a:t>num1 = 12</a:t>
+              <a:t>num1 = </a:t>
+            </a:r>
+            <a:r>
+              <a:rPr sz="1400">
+                <a:solidFill>
+                  <a:srgbClr val="1750EB"/>
+                </a:solidFill>
+                <a:latin typeface="JetBrains Mono"/>
+                <a:ea typeface="JetBrains Mono"/>
+                <a:cs typeface="JetBrains Mono"/>
+              </a:rPr>
+              <a:t>int</a:t>
+            </a:r>
+            <a:r>
+              <a:rPr sz="1400">
+                <a:solidFill>
+                  <a:srgbClr val="080808"/>
+                </a:solidFill>
+                <a:latin typeface="JetBrains Mono"/>
+                <a:ea typeface="JetBrains Mono"/>
+                <a:cs typeface="JetBrains Mono"/>
+              </a:rPr>
+              <a:t>(</a:t>
+            </a:r>
+            <a:r>
+              <a:rPr sz="1400">
+                <a:solidFill>
+                  <a:srgbClr val="1750EB"/>
+                </a:solidFill>
+                <a:latin typeface="JetBrains Mono"/>
+                <a:ea typeface="JetBrains Mono"/>
+                <a:cs typeface="JetBrains Mono"/>
+              </a:rPr>
+              <a:t>input</a:t>
+            </a:r>
+            <a:r>
+              <a:rPr sz="1400">
+                <a:solidFill>
+                  <a:srgbClr val="080808"/>
+                </a:solidFill>
+                <a:latin typeface="JetBrains Mono"/>
+                <a:ea typeface="JetBrains Mono"/>
+                <a:cs typeface="JetBrains Mono"/>
+              </a:rPr>
+              <a:t>(</a:t>
+            </a:r>
+            <a:r>
+              <a:rPr sz="1400">
+                <a:solidFill>
+                  <a:srgbClr val="067D17"/>
+                </a:solidFill>
+                <a:latin typeface="JetBrains Mono"/>
+                <a:ea typeface="JetBrains Mono"/>
+                <a:cs typeface="JetBrains Mono"/>
+              </a:rPr>
+              <a:t>"Enter the first whole number: "</a:t>
+            </a:r>
+            <a:r>
+              <a:rPr sz="1400">
+                <a:solidFill>
+                  <a:srgbClr val="080808"/>
+                </a:solidFill>
+                <a:latin typeface="JetBrains Mono"/>
+                <a:ea typeface="JetBrains Mono"/>
+                <a:cs typeface="JetBrains Mono"/>
+              </a:rPr>
+              <a:t>))</a:t>
             </a:r>
             <a:br>
               <a:rPr sz="1400">
@@ -7891,7 +8104,7 @@
                 <a:ea typeface="JetBrains Mono"/>
                 <a:cs typeface="JetBrains Mono"/>
               </a:rPr>
-              <a:t>"Enter a whole number: "</a:t>
+              <a:t>"Enter the second whole number: "</a:t>
             </a:r>
             <a:r>
               <a:rPr sz="1400">
@@ -7914,7 +8127,7 @@
                 <a:cs typeface="JetBrains Mono"/>
               </a:rPr>
             </a:br>
-            <a:br>
+            <a:r>
               <a:rPr sz="1400">
                 <a:solidFill>
                   <a:srgbClr val="080808"/>
@@ -7923,28 +8136,8 @@
                 <a:ea typeface="JetBrains Mono"/>
                 <a:cs typeface="JetBrains Mono"/>
               </a:rPr>
-            </a:br>
-            <a:r>
-              <a:rPr sz="1400">
-                <a:solidFill>
-                  <a:srgbClr val="080808"/>
-                </a:solidFill>
-                <a:latin typeface="JetBrains Mono"/>
-                <a:ea typeface="JetBrains Mono"/>
-                <a:cs typeface="JetBrains Mono"/>
-              </a:rPr>
               <a:t>total = num1 + num2</a:t>
             </a:r>
-            <a:br>
-              <a:rPr sz="1400">
-                <a:solidFill>
-                  <a:srgbClr val="080808"/>
-                </a:solidFill>
-                <a:latin typeface="JetBrains Mono"/>
-                <a:ea typeface="JetBrains Mono"/>
-                <a:cs typeface="JetBrains Mono"/>
-              </a:rPr>
-            </a:br>
             <a:br>
               <a:rPr sz="1400">
                 <a:solidFill>
@@ -8101,7 +8294,73 @@
                 <a:ea typeface="Calibri"/>
                 <a:cs typeface="Calibri"/>
               </a:rPr>
-              <a:t>Create a program that asks for three whole numbers, subtracts the second and third from the first, and displays the total.</a:t>
+              <a:t>Create a pizza program. Ask how many slices there are, then how many slices each of two friends eats. Convert every answer with </a:t>
+            </a:r>
+            <a:r>
+              <a:rPr sz="2050" b="0">
+                <a:solidFill>
+                  <a:srgbClr val="1750EB"/>
+                </a:solidFill>
+                <a:latin typeface="JetBrains Mono"/>
+                <a:ea typeface="JetBrains Mono"/>
+                <a:cs typeface="JetBrains Mono"/>
+              </a:rPr>
+              <a:t>int()</a:t>
+            </a:r>
+            <a:r>
+              <a:rPr sz="2400" b="0">
+                <a:solidFill>
+                  <a:srgbClr val="080808"/>
+                </a:solidFill>
+                <a:latin typeface="Calibri"/>
+                <a:ea typeface="Calibri"/>
+                <a:cs typeface="Calibri"/>
+              </a:rPr>
+              <a:t> and display </a:t>
+            </a:r>
+            <a:r>
+              <a:rPr sz="2050" b="0">
+                <a:solidFill>
+                  <a:srgbClr val="067D17"/>
+                </a:solidFill>
+                <a:latin typeface="JetBrains Mono"/>
+                <a:ea typeface="JetBrains Mono"/>
+                <a:cs typeface="JetBrains Mono"/>
+              </a:rPr>
+              <a:t>"Slices left:"</a:t>
+            </a:r>
+            <a:r>
+              <a:rPr sz="2400" b="0">
+                <a:solidFill>
+                  <a:srgbClr val="080808"/>
+                </a:solidFill>
+                <a:latin typeface="Calibri"/>
+                <a:ea typeface="Calibri"/>
+                <a:cs typeface="Calibri"/>
+              </a:rPr>
+              <a:t> followed by the number left. For example, 12, 3 and 2 display </a:t>
+            </a:r>
+            <a:r>
+              <a:rPr sz="2050" b="0">
+                <a:solidFill>
+                  <a:srgbClr val="067D17"/>
+                </a:solidFill>
+                <a:latin typeface="JetBrains Mono"/>
+                <a:ea typeface="JetBrains Mono"/>
+                <a:cs typeface="JetBrains Mono"/>
+              </a:rPr>
+              <a:t>"Slices left: 7"</a:t>
+            </a:r>
+            <a:r>
+              <a:rPr sz="2400" b="0">
+                <a:solidFill>
+                  <a:srgbClr val="080808"/>
+                </a:solidFill>
+                <a:latin typeface="Calibri"/>
+                <a:ea typeface="Calibri"/>
+                <a:cs typeface="Calibri"/>
+              </a:rPr>
+              <a:t>.</a:t>
             </a:r>
           </a:p>
         </p:txBody>

--- a/Mapped Curriculum Lessons/Grade 6/Lesson 02 - Operators and Integers/Operators and Integers - Slides.pptx
+++ b/Mapped Curriculum Lessons/Grade 6/Lesson 02 - Operators and Integers/Operators and Integers - Slides.pptx
@@ -2,28 +2,28 @@
 <file path=ppt/presentation.xml><?xml version="1.0" encoding="utf-8"?>
 <p:presentation xmlns:p="http://schemas.openxmlformats.org/presentationml/2006/main" embedTrueTypeFonts="1" saveSubsetFonts="0">
   <p:sldMasterIdLst>
-    <p:sldMasterId xmlns:r="http://schemas.openxmlformats.org/officeDocument/2006/relationships" id="2147483648" r:id="R64232dd7ae2a4ea3"/>
+    <p:sldMasterId xmlns:r="http://schemas.openxmlformats.org/officeDocument/2006/relationships" id="2147483648" r:id="Rfbef9cac89904013"/>
   </p:sldMasterIdLst>
   <p:notesMasterIdLst>
-    <p:notesMasterId xmlns:r="http://schemas.openxmlformats.org/officeDocument/2006/relationships" r:id="R6779c5632897455d"/>
+    <p:notesMasterId xmlns:r="http://schemas.openxmlformats.org/officeDocument/2006/relationships" r:id="Rc35af77e126c4bdd"/>
   </p:notesMasterIdLst>
   <p:sldIdLst>
-    <p:sldId xmlns:r="http://schemas.openxmlformats.org/officeDocument/2006/relationships" id="256" r:id="R35a43c6a7f1a41cc"/>
-    <p:sldId xmlns:r="http://schemas.openxmlformats.org/officeDocument/2006/relationships" id="257" r:id="R353ebf3edb524cc5"/>
-    <p:sldId xmlns:r="http://schemas.openxmlformats.org/officeDocument/2006/relationships" id="258" r:id="Rd4c1f8b23dcf4537"/>
-    <p:sldId xmlns:r="http://schemas.openxmlformats.org/officeDocument/2006/relationships" id="259" r:id="R0de29b7fc3994b35"/>
-    <p:sldId xmlns:r="http://schemas.openxmlformats.org/officeDocument/2006/relationships" id="260" r:id="R361056bd852f4c3d"/>
-    <p:sldId xmlns:r="http://schemas.openxmlformats.org/officeDocument/2006/relationships" id="261" r:id="R38d7c304cb42466a"/>
-    <p:sldId xmlns:r="http://schemas.openxmlformats.org/officeDocument/2006/relationships" id="262" r:id="R5100f683eee244d8"/>
-    <p:sldId xmlns:r="http://schemas.openxmlformats.org/officeDocument/2006/relationships" id="263" r:id="R3bb9b36c8789478b"/>
-    <p:sldId xmlns:r="http://schemas.openxmlformats.org/officeDocument/2006/relationships" id="264" r:id="R62b23c7544b54d9e"/>
+    <p:sldId xmlns:r="http://schemas.openxmlformats.org/officeDocument/2006/relationships" id="256" r:id="R4ee7fa2cf1134cb6"/>
+    <p:sldId xmlns:r="http://schemas.openxmlformats.org/officeDocument/2006/relationships" id="257" r:id="R5e5d3d78915a4539"/>
+    <p:sldId xmlns:r="http://schemas.openxmlformats.org/officeDocument/2006/relationships" id="258" r:id="R477d43bff9de40f7"/>
+    <p:sldId xmlns:r="http://schemas.openxmlformats.org/officeDocument/2006/relationships" id="259" r:id="Rcfb3e9a66f6747cb"/>
+    <p:sldId xmlns:r="http://schemas.openxmlformats.org/officeDocument/2006/relationships" id="260" r:id="R1445cb515142461e"/>
+    <p:sldId xmlns:r="http://schemas.openxmlformats.org/officeDocument/2006/relationships" id="261" r:id="Rea5d9c83015243fd"/>
+    <p:sldId xmlns:r="http://schemas.openxmlformats.org/officeDocument/2006/relationships" id="262" r:id="R2cdd16f812dc4e0b"/>
+    <p:sldId xmlns:r="http://schemas.openxmlformats.org/officeDocument/2006/relationships" id="263" r:id="R66832f402a4c4fb7"/>
+    <p:sldId xmlns:r="http://schemas.openxmlformats.org/officeDocument/2006/relationships" id="264" r:id="R737dc15fdb6b4a25"/>
   </p:sldIdLst>
   <p:sldSz cx="12192000" cy="6858000"/>
   <p:notesSz cx="6858000" cy="9144000"/>
   <p:embeddedFontLst>
     <p:embeddedFont>
       <p:font typeface="JetBrains Mono"/>
-      <p:regular xmlns:r="http://schemas.openxmlformats.org/officeDocument/2006/relationships" r:id="Rf1a563c8fbc6463a"/>
+      <p:regular xmlns:r="http://schemas.openxmlformats.org/officeDocument/2006/relationships" r:id="R6f77febb2cfa407c"/>
     </p:embeddedFont>
   </p:embeddedFontLst>
 </p:presentation>
@@ -1071,7 +1071,7 @@
           <p:nvPr/>
         </p:nvPicPr>
         <p:blipFill rotWithShape="1">
-          <a:blip xmlns:r="http://schemas.openxmlformats.org/officeDocument/2006/relationships" xmlns:a="http://schemas.openxmlformats.org/drawingml/2006/main" r:embed="Re88f197cf4384f2d"/>
+          <a:blip xmlns:r="http://schemas.openxmlformats.org/officeDocument/2006/relationships" xmlns:a="http://schemas.openxmlformats.org/drawingml/2006/main" r:embed="Rafd5a1781cb049b1"/>
           <a:stretch xmlns:a="http://schemas.openxmlformats.org/drawingml/2006/main"/>
         </p:blipFill>
         <p:spPr>
@@ -1451,7 +1451,7 @@
           <p:nvPr/>
         </p:nvPicPr>
         <p:blipFill rotWithShape="1">
-          <a:blip xmlns:r="http://schemas.openxmlformats.org/officeDocument/2006/relationships" xmlns:a="http://schemas.openxmlformats.org/drawingml/2006/main" r:embed="Rb5615a3366ce4e1a">
+          <a:blip xmlns:r="http://schemas.openxmlformats.org/officeDocument/2006/relationships" xmlns:a="http://schemas.openxmlformats.org/drawingml/2006/main" r:embed="Rb3fad4077a07434a">
             <a:alphaModFix amt="28000"/>
           </a:blip>
           <a:stretch xmlns:a="http://schemas.openxmlformats.org/drawingml/2006/main"/>
@@ -1664,7 +1664,7 @@
           <p:nvPr/>
         </p:nvPicPr>
         <p:blipFill rotWithShape="1">
-          <a:blip xmlns:r="http://schemas.openxmlformats.org/officeDocument/2006/relationships" xmlns:a="http://schemas.openxmlformats.org/drawingml/2006/main" r:embed="Raf0a52aa1ccb43c0">
+          <a:blip xmlns:r="http://schemas.openxmlformats.org/officeDocument/2006/relationships" xmlns:a="http://schemas.openxmlformats.org/drawingml/2006/main" r:embed="Re9bb8d1bfee34292">
             <a:alphaModFix amt="28000"/>
           </a:blip>
           <a:stretch xmlns:a="http://schemas.openxmlformats.org/drawingml/2006/main"/>
@@ -1899,7 +1899,7 @@
           <p:nvPr/>
         </p:nvPicPr>
         <p:blipFill rotWithShape="1">
-          <a:blip xmlns:r="http://schemas.openxmlformats.org/officeDocument/2006/relationships" xmlns:a="http://schemas.openxmlformats.org/drawingml/2006/main" r:embed="R96355a79b9fb48bd">
+          <a:blip xmlns:r="http://schemas.openxmlformats.org/officeDocument/2006/relationships" xmlns:a="http://schemas.openxmlformats.org/drawingml/2006/main" r:embed="Rb7938e0e13704b1b">
             <a:alphaModFix amt="28000"/>
           </a:blip>
           <a:stretch xmlns:a="http://schemas.openxmlformats.org/drawingml/2006/main"/>
@@ -2176,7 +2176,7 @@
           <p:nvPr/>
         </p:nvPicPr>
         <p:blipFill rotWithShape="1">
-          <a:blip xmlns:r="http://schemas.openxmlformats.org/officeDocument/2006/relationships" xmlns:a="http://schemas.openxmlformats.org/drawingml/2006/main" r:embed="R7bf1fa35ac5d446b">
+          <a:blip xmlns:r="http://schemas.openxmlformats.org/officeDocument/2006/relationships" xmlns:a="http://schemas.openxmlformats.org/drawingml/2006/main" r:embed="R9e9cc562d3dc4946">
             <a:alphaModFix amt="28000"/>
           </a:blip>
           <a:stretch xmlns:a="http://schemas.openxmlformats.org/drawingml/2006/main"/>
@@ -2451,7 +2451,7 @@
           <p:nvPr/>
         </p:nvPicPr>
         <p:blipFill rotWithShape="1">
-          <a:blip xmlns:r="http://schemas.openxmlformats.org/officeDocument/2006/relationships" xmlns:a="http://schemas.openxmlformats.org/drawingml/2006/main" r:embed="R9ba483acce324b58">
+          <a:blip xmlns:r="http://schemas.openxmlformats.org/officeDocument/2006/relationships" xmlns:a="http://schemas.openxmlformats.org/drawingml/2006/main" r:embed="R0e6063b2a60941db">
             <a:alphaModFix amt="28000"/>
           </a:blip>
           <a:stretch xmlns:a="http://schemas.openxmlformats.org/drawingml/2006/main"/>
@@ -2875,7 +2875,7 @@
           <p:nvPr/>
         </p:nvPicPr>
         <p:blipFill rotWithShape="1">
-          <a:blip xmlns:r="http://schemas.openxmlformats.org/officeDocument/2006/relationships" xmlns:a="http://schemas.openxmlformats.org/drawingml/2006/main" r:embed="R87a895f6355f418c">
+          <a:blip xmlns:r="http://schemas.openxmlformats.org/officeDocument/2006/relationships" xmlns:a="http://schemas.openxmlformats.org/drawingml/2006/main" r:embed="R6282c0a3a0444946">
             <a:alphaModFix amt="28000"/>
           </a:blip>
           <a:stretch xmlns:a="http://schemas.openxmlformats.org/drawingml/2006/main"/>
@@ -3016,7 +3016,7 @@
           <p:nvPr/>
         </p:nvPicPr>
         <p:blipFill rotWithShape="1">
-          <a:blip xmlns:r="http://schemas.openxmlformats.org/officeDocument/2006/relationships" xmlns:a="http://schemas.openxmlformats.org/drawingml/2006/main" r:embed="R760e37e9b29b43e9">
+          <a:blip xmlns:r="http://schemas.openxmlformats.org/officeDocument/2006/relationships" xmlns:a="http://schemas.openxmlformats.org/drawingml/2006/main" r:embed="Rbef233ca3ea648b6">
             <a:alphaModFix amt="28000"/>
           </a:blip>
           <a:stretch xmlns:a="http://schemas.openxmlformats.org/drawingml/2006/main"/>
@@ -3130,7 +3130,7 @@
           <p:nvPr/>
         </p:nvPicPr>
         <p:blipFill rotWithShape="1">
-          <a:blip xmlns:r="http://schemas.openxmlformats.org/officeDocument/2006/relationships" xmlns:a="http://schemas.openxmlformats.org/drawingml/2006/main" r:embed="Raa1179477c25433d">
+          <a:blip xmlns:r="http://schemas.openxmlformats.org/officeDocument/2006/relationships" xmlns:a="http://schemas.openxmlformats.org/drawingml/2006/main" r:embed="Re8c16080c548434e">
             <a:alphaModFix amt="28000"/>
           </a:blip>
           <a:stretch xmlns:a="http://schemas.openxmlformats.org/drawingml/2006/main"/>
@@ -3457,7 +3457,7 @@
           <p:nvPr/>
         </p:nvPicPr>
         <p:blipFill rotWithShape="1">
-          <a:blip xmlns:r="http://schemas.openxmlformats.org/officeDocument/2006/relationships" xmlns:a="http://schemas.openxmlformats.org/drawingml/2006/main" r:embed="Rb14db22299374c64">
+          <a:blip xmlns:r="http://schemas.openxmlformats.org/officeDocument/2006/relationships" xmlns:a="http://schemas.openxmlformats.org/drawingml/2006/main" r:embed="Rb9a3eb5ce91d4c59">
             <a:alphaModFix amt="28000"/>
           </a:blip>
           <a:stretch xmlns:a="http://schemas.openxmlformats.org/drawingml/2006/main"/>
@@ -3745,7 +3745,7 @@
           <p:nvPr/>
         </p:nvPicPr>
         <p:blipFill rotWithShape="1">
-          <a:blip xmlns:r="http://schemas.openxmlformats.org/officeDocument/2006/relationships" xmlns:a="http://schemas.openxmlformats.org/drawingml/2006/main" r:embed="Rd3affc281873430c">
+          <a:blip xmlns:r="http://schemas.openxmlformats.org/officeDocument/2006/relationships" xmlns:a="http://schemas.openxmlformats.org/drawingml/2006/main" r:embed="Ra907877f46814637">
             <a:alphaModFix amt="28000"/>
           </a:blip>
           <a:stretch xmlns:a="http://schemas.openxmlformats.org/drawingml/2006/main"/>
@@ -3982,17 +3982,17 @@
   </p:cSld>
   <p:clrMap bg1="lt1" tx1="dk1" bg2="lt2" tx2="dk2" accent1="accent1" accent2="accent2" accent3="accent3" accent4="accent4" accent5="accent5" accent6="accent6" hlink="hlink" folHlink="folHlink"/>
   <p:sldLayoutIdLst>
-    <p:sldLayoutId xmlns:r="http://schemas.openxmlformats.org/officeDocument/2006/relationships" id="2147483649" r:id="Rb1d5ca94d5e94549"/>
-    <p:sldLayoutId xmlns:r="http://schemas.openxmlformats.org/officeDocument/2006/relationships" id="2147483650" r:id="Rebcbf3d97eff48ae"/>
-    <p:sldLayoutId xmlns:r="http://schemas.openxmlformats.org/officeDocument/2006/relationships" id="2147483651" r:id="R41e771290e914d35"/>
-    <p:sldLayoutId xmlns:r="http://schemas.openxmlformats.org/officeDocument/2006/relationships" id="2147483652" r:id="R9566bdd4cbcb4744"/>
-    <p:sldLayoutId xmlns:r="http://schemas.openxmlformats.org/officeDocument/2006/relationships" id="2147483653" r:id="R3024646b090b4d38"/>
-    <p:sldLayoutId xmlns:r="http://schemas.openxmlformats.org/officeDocument/2006/relationships" id="2147483654" r:id="Re9b240879d24468f"/>
-    <p:sldLayoutId xmlns:r="http://schemas.openxmlformats.org/officeDocument/2006/relationships" id="2147483655" r:id="R9ba6e6735aee4967"/>
-    <p:sldLayoutId xmlns:r="http://schemas.openxmlformats.org/officeDocument/2006/relationships" id="2147483656" r:id="Rf51d6fdad86b47d4"/>
-    <p:sldLayoutId xmlns:r="http://schemas.openxmlformats.org/officeDocument/2006/relationships" id="2147483657" r:id="Ra8a02063ef06417c"/>
-    <p:sldLayoutId xmlns:r="http://schemas.openxmlformats.org/officeDocument/2006/relationships" id="2147483658" r:id="Rc77ece3ea0af4000"/>
-    <p:sldLayoutId xmlns:r="http://schemas.openxmlformats.org/officeDocument/2006/relationships" id="2147483659" r:id="Rf3302bd250b449cf"/>
+    <p:sldLayoutId xmlns:r="http://schemas.openxmlformats.org/officeDocument/2006/relationships" id="2147483649" r:id="R4f960efeda9242b6"/>
+    <p:sldLayoutId xmlns:r="http://schemas.openxmlformats.org/officeDocument/2006/relationships" id="2147483650" r:id="R1f5991984d24450e"/>
+    <p:sldLayoutId xmlns:r="http://schemas.openxmlformats.org/officeDocument/2006/relationships" id="2147483651" r:id="Ra780088f60c44634"/>
+    <p:sldLayoutId xmlns:r="http://schemas.openxmlformats.org/officeDocument/2006/relationships" id="2147483652" r:id="Re9583adc41804556"/>
+    <p:sldLayoutId xmlns:r="http://schemas.openxmlformats.org/officeDocument/2006/relationships" id="2147483653" r:id="R4048ec1b4fd647d5"/>
+    <p:sldLayoutId xmlns:r="http://schemas.openxmlformats.org/officeDocument/2006/relationships" id="2147483654" r:id="R4ed4f05f0891498d"/>
+    <p:sldLayoutId xmlns:r="http://schemas.openxmlformats.org/officeDocument/2006/relationships" id="2147483655" r:id="Rec13fcc79efb4bd9"/>
+    <p:sldLayoutId xmlns:r="http://schemas.openxmlformats.org/officeDocument/2006/relationships" id="2147483656" r:id="Re0c2f20a9606420e"/>
+    <p:sldLayoutId xmlns:r="http://schemas.openxmlformats.org/officeDocument/2006/relationships" id="2147483657" r:id="Ra7a55a0301da432a"/>
+    <p:sldLayoutId xmlns:r="http://schemas.openxmlformats.org/officeDocument/2006/relationships" id="2147483658" r:id="Ra5f508fbbd814b79"/>
+    <p:sldLayoutId xmlns:r="http://schemas.openxmlformats.org/officeDocument/2006/relationships" id="2147483659" r:id="Rf51eadbeca554333"/>
   </p:sldLayoutIdLst>
   <p:hf hdr="0" ftr="0" dt="0"/>
   <p:txStyles>

--- a/Mapped Curriculum Lessons/Grade 6/Lesson 02 - Operators and Integers/Operators and Integers - Slides.pptx
+++ b/Mapped Curriculum Lessons/Grade 6/Lesson 02 - Operators and Integers/Operators and Integers - Slides.pptx
@@ -2,28 +2,28 @@
 <file path=ppt/presentation.xml><?xml version="1.0" encoding="utf-8"?>
 <p:presentation xmlns:p="http://schemas.openxmlformats.org/presentationml/2006/main" embedTrueTypeFonts="1" saveSubsetFonts="0">
   <p:sldMasterIdLst>
-    <p:sldMasterId xmlns:r="http://schemas.openxmlformats.org/officeDocument/2006/relationships" id="2147483648" r:id="Rfbef9cac89904013"/>
+    <p:sldMasterId xmlns:r="http://schemas.openxmlformats.org/officeDocument/2006/relationships" id="2147483648" r:id="R691e2454aa9d4ca5"/>
   </p:sldMasterIdLst>
   <p:notesMasterIdLst>
-    <p:notesMasterId xmlns:r="http://schemas.openxmlformats.org/officeDocument/2006/relationships" r:id="Rc35af77e126c4bdd"/>
+    <p:notesMasterId xmlns:r="http://schemas.openxmlformats.org/officeDocument/2006/relationships" r:id="Rc6a619938ed040f1"/>
   </p:notesMasterIdLst>
   <p:sldIdLst>
-    <p:sldId xmlns:r="http://schemas.openxmlformats.org/officeDocument/2006/relationships" id="256" r:id="R4ee7fa2cf1134cb6"/>
-    <p:sldId xmlns:r="http://schemas.openxmlformats.org/officeDocument/2006/relationships" id="257" r:id="R5e5d3d78915a4539"/>
-    <p:sldId xmlns:r="http://schemas.openxmlformats.org/officeDocument/2006/relationships" id="258" r:id="R477d43bff9de40f7"/>
-    <p:sldId xmlns:r="http://schemas.openxmlformats.org/officeDocument/2006/relationships" id="259" r:id="Rcfb3e9a66f6747cb"/>
-    <p:sldId xmlns:r="http://schemas.openxmlformats.org/officeDocument/2006/relationships" id="260" r:id="R1445cb515142461e"/>
-    <p:sldId xmlns:r="http://schemas.openxmlformats.org/officeDocument/2006/relationships" id="261" r:id="Rea5d9c83015243fd"/>
-    <p:sldId xmlns:r="http://schemas.openxmlformats.org/officeDocument/2006/relationships" id="262" r:id="R2cdd16f812dc4e0b"/>
-    <p:sldId xmlns:r="http://schemas.openxmlformats.org/officeDocument/2006/relationships" id="263" r:id="R66832f402a4c4fb7"/>
-    <p:sldId xmlns:r="http://schemas.openxmlformats.org/officeDocument/2006/relationships" id="264" r:id="R737dc15fdb6b4a25"/>
+    <p:sldId xmlns:r="http://schemas.openxmlformats.org/officeDocument/2006/relationships" id="256" r:id="R915c356a102f41aa"/>
+    <p:sldId xmlns:r="http://schemas.openxmlformats.org/officeDocument/2006/relationships" id="257" r:id="Rc44a8f68b026437b"/>
+    <p:sldId xmlns:r="http://schemas.openxmlformats.org/officeDocument/2006/relationships" id="258" r:id="R1414d77ce83e40ca"/>
+    <p:sldId xmlns:r="http://schemas.openxmlformats.org/officeDocument/2006/relationships" id="259" r:id="R225297c556464f08"/>
+    <p:sldId xmlns:r="http://schemas.openxmlformats.org/officeDocument/2006/relationships" id="260" r:id="R6f61ffce81b147bc"/>
+    <p:sldId xmlns:r="http://schemas.openxmlformats.org/officeDocument/2006/relationships" id="261" r:id="R7e2f09eb8ae24e03"/>
+    <p:sldId xmlns:r="http://schemas.openxmlformats.org/officeDocument/2006/relationships" id="262" r:id="R4a70f779d93e48aa"/>
+    <p:sldId xmlns:r="http://schemas.openxmlformats.org/officeDocument/2006/relationships" id="263" r:id="R25d27bc422ba470b"/>
+    <p:sldId xmlns:r="http://schemas.openxmlformats.org/officeDocument/2006/relationships" id="264" r:id="Raebcb81f35464868"/>
   </p:sldIdLst>
   <p:sldSz cx="12192000" cy="6858000"/>
   <p:notesSz cx="6858000" cy="9144000"/>
   <p:embeddedFontLst>
     <p:embeddedFont>
       <p:font typeface="JetBrains Mono"/>
-      <p:regular xmlns:r="http://schemas.openxmlformats.org/officeDocument/2006/relationships" r:id="R6f77febb2cfa407c"/>
+      <p:regular xmlns:r="http://schemas.openxmlformats.org/officeDocument/2006/relationships" r:id="R3659b2c496eb46f1"/>
     </p:embeddedFont>
   </p:embeddedFontLst>
 </p:presentation>
@@ -1071,7 +1071,7 @@
           <p:nvPr/>
         </p:nvPicPr>
         <p:blipFill rotWithShape="1">
-          <a:blip xmlns:r="http://schemas.openxmlformats.org/officeDocument/2006/relationships" xmlns:a="http://schemas.openxmlformats.org/drawingml/2006/main" r:embed="Rafd5a1781cb049b1"/>
+          <a:blip xmlns:r="http://schemas.openxmlformats.org/officeDocument/2006/relationships" xmlns:a="http://schemas.openxmlformats.org/drawingml/2006/main" r:embed="R5e14108ccbdd49db"/>
           <a:stretch xmlns:a="http://schemas.openxmlformats.org/drawingml/2006/main"/>
         </p:blipFill>
         <p:spPr>
@@ -1451,7 +1451,7 @@
           <p:nvPr/>
         </p:nvPicPr>
         <p:blipFill rotWithShape="1">
-          <a:blip xmlns:r="http://schemas.openxmlformats.org/officeDocument/2006/relationships" xmlns:a="http://schemas.openxmlformats.org/drawingml/2006/main" r:embed="Rb3fad4077a07434a">
+          <a:blip xmlns:r="http://schemas.openxmlformats.org/officeDocument/2006/relationships" xmlns:a="http://schemas.openxmlformats.org/drawingml/2006/main" r:embed="R16291421d28c430e">
             <a:alphaModFix amt="28000"/>
           </a:blip>
           <a:stretch xmlns:a="http://schemas.openxmlformats.org/drawingml/2006/main"/>
@@ -1664,7 +1664,7 @@
           <p:nvPr/>
         </p:nvPicPr>
         <p:blipFill rotWithShape="1">
-          <a:blip xmlns:r="http://schemas.openxmlformats.org/officeDocument/2006/relationships" xmlns:a="http://schemas.openxmlformats.org/drawingml/2006/main" r:embed="Re9bb8d1bfee34292">
+          <a:blip xmlns:r="http://schemas.openxmlformats.org/officeDocument/2006/relationships" xmlns:a="http://schemas.openxmlformats.org/drawingml/2006/main" r:embed="Rd4d12c909d8148f2">
             <a:alphaModFix amt="28000"/>
           </a:blip>
           <a:stretch xmlns:a="http://schemas.openxmlformats.org/drawingml/2006/main"/>
@@ -1899,7 +1899,7 @@
           <p:nvPr/>
         </p:nvPicPr>
         <p:blipFill rotWithShape="1">
-          <a:blip xmlns:r="http://schemas.openxmlformats.org/officeDocument/2006/relationships" xmlns:a="http://schemas.openxmlformats.org/drawingml/2006/main" r:embed="Rb7938e0e13704b1b">
+          <a:blip xmlns:r="http://schemas.openxmlformats.org/officeDocument/2006/relationships" xmlns:a="http://schemas.openxmlformats.org/drawingml/2006/main" r:embed="R46cfa3340da643b3">
             <a:alphaModFix amt="28000"/>
           </a:blip>
           <a:stretch xmlns:a="http://schemas.openxmlformats.org/drawingml/2006/main"/>
@@ -2176,7 +2176,7 @@
           <p:nvPr/>
         </p:nvPicPr>
         <p:blipFill rotWithShape="1">
-          <a:blip xmlns:r="http://schemas.openxmlformats.org/officeDocument/2006/relationships" xmlns:a="http://schemas.openxmlformats.org/drawingml/2006/main" r:embed="R9e9cc562d3dc4946">
+          <a:blip xmlns:r="http://schemas.openxmlformats.org/officeDocument/2006/relationships" xmlns:a="http://schemas.openxmlformats.org/drawingml/2006/main" r:embed="R1a5c8b92ba10453c">
             <a:alphaModFix amt="28000"/>
           </a:blip>
           <a:stretch xmlns:a="http://schemas.openxmlformats.org/drawingml/2006/main"/>
@@ -2451,7 +2451,7 @@
           <p:nvPr/>
         </p:nvPicPr>
         <p:blipFill rotWithShape="1">
-          <a:blip xmlns:r="http://schemas.openxmlformats.org/officeDocument/2006/relationships" xmlns:a="http://schemas.openxmlformats.org/drawingml/2006/main" r:embed="R0e6063b2a60941db">
+          <a:blip xmlns:r="http://schemas.openxmlformats.org/officeDocument/2006/relationships" xmlns:a="http://schemas.openxmlformats.org/drawingml/2006/main" r:embed="Rd554d3ae6d7d4ccd">
             <a:alphaModFix amt="28000"/>
           </a:blip>
           <a:stretch xmlns:a="http://schemas.openxmlformats.org/drawingml/2006/main"/>
@@ -2875,7 +2875,7 @@
           <p:nvPr/>
         </p:nvPicPr>
         <p:blipFill rotWithShape="1">
-          <a:blip xmlns:r="http://schemas.openxmlformats.org/officeDocument/2006/relationships" xmlns:a="http://schemas.openxmlformats.org/drawingml/2006/main" r:embed="R6282c0a3a0444946">
+          <a:blip xmlns:r="http://schemas.openxmlformats.org/officeDocument/2006/relationships" xmlns:a="http://schemas.openxmlformats.org/drawingml/2006/main" r:embed="Rd88e0b5b03094756">
             <a:alphaModFix amt="28000"/>
           </a:blip>
           <a:stretch xmlns:a="http://schemas.openxmlformats.org/drawingml/2006/main"/>
@@ -3016,7 +3016,7 @@
           <p:nvPr/>
         </p:nvPicPr>
         <p:blipFill rotWithShape="1">
-          <a:blip xmlns:r="http://schemas.openxmlformats.org/officeDocument/2006/relationships" xmlns:a="http://schemas.openxmlformats.org/drawingml/2006/main" r:embed="Rbef233ca3ea648b6">
+          <a:blip xmlns:r="http://schemas.openxmlformats.org/officeDocument/2006/relationships" xmlns:a="http://schemas.openxmlformats.org/drawingml/2006/main" r:embed="R037c8e0d76c94d4c">
             <a:alphaModFix amt="28000"/>
           </a:blip>
           <a:stretch xmlns:a="http://schemas.openxmlformats.org/drawingml/2006/main"/>
@@ -3130,7 +3130,7 @@
           <p:nvPr/>
         </p:nvPicPr>
         <p:blipFill rotWithShape="1">
-          <a:blip xmlns:r="http://schemas.openxmlformats.org/officeDocument/2006/relationships" xmlns:a="http://schemas.openxmlformats.org/drawingml/2006/main" r:embed="Re8c16080c548434e">
+          <a:blip xmlns:r="http://schemas.openxmlformats.org/officeDocument/2006/relationships" xmlns:a="http://schemas.openxmlformats.org/drawingml/2006/main" r:embed="R092d6563d2954c15">
             <a:alphaModFix amt="28000"/>
           </a:blip>
           <a:stretch xmlns:a="http://schemas.openxmlformats.org/drawingml/2006/main"/>
@@ -3457,7 +3457,7 @@
           <p:nvPr/>
         </p:nvPicPr>
         <p:blipFill rotWithShape="1">
-          <a:blip xmlns:r="http://schemas.openxmlformats.org/officeDocument/2006/relationships" xmlns:a="http://schemas.openxmlformats.org/drawingml/2006/main" r:embed="Rb9a3eb5ce91d4c59">
+          <a:blip xmlns:r="http://schemas.openxmlformats.org/officeDocument/2006/relationships" xmlns:a="http://schemas.openxmlformats.org/drawingml/2006/main" r:embed="R84cbb884201744f2">
             <a:alphaModFix amt="28000"/>
           </a:blip>
           <a:stretch xmlns:a="http://schemas.openxmlformats.org/drawingml/2006/main"/>
@@ -3745,7 +3745,7 @@
           <p:nvPr/>
         </p:nvPicPr>
         <p:blipFill rotWithShape="1">
-          <a:blip xmlns:r="http://schemas.openxmlformats.org/officeDocument/2006/relationships" xmlns:a="http://schemas.openxmlformats.org/drawingml/2006/main" r:embed="Ra907877f46814637">
+          <a:blip xmlns:r="http://schemas.openxmlformats.org/officeDocument/2006/relationships" xmlns:a="http://schemas.openxmlformats.org/drawingml/2006/main" r:embed="Reb70eccc99d04a70">
             <a:alphaModFix amt="28000"/>
           </a:blip>
           <a:stretch xmlns:a="http://schemas.openxmlformats.org/drawingml/2006/main"/>
@@ -3982,17 +3982,17 @@
   </p:cSld>
   <p:clrMap bg1="lt1" tx1="dk1" bg2="lt2" tx2="dk2" accent1="accent1" accent2="accent2" accent3="accent3" accent4="accent4" accent5="accent5" accent6="accent6" hlink="hlink" folHlink="folHlink"/>
   <p:sldLayoutIdLst>
-    <p:sldLayoutId xmlns:r="http://schemas.openxmlformats.org/officeDocument/2006/relationships" id="2147483649" r:id="R4f960efeda9242b6"/>
-    <p:sldLayoutId xmlns:r="http://schemas.openxmlformats.org/officeDocument/2006/relationships" id="2147483650" r:id="R1f5991984d24450e"/>
-    <p:sldLayoutId xmlns:r="http://schemas.openxmlformats.org/officeDocument/2006/relationships" id="2147483651" r:id="Ra780088f60c44634"/>
-    <p:sldLayoutId xmlns:r="http://schemas.openxmlformats.org/officeDocument/2006/relationships" id="2147483652" r:id="Re9583adc41804556"/>
-    <p:sldLayoutId xmlns:r="http://schemas.openxmlformats.org/officeDocument/2006/relationships" id="2147483653" r:id="R4048ec1b4fd647d5"/>
-    <p:sldLayoutId xmlns:r="http://schemas.openxmlformats.org/officeDocument/2006/relationships" id="2147483654" r:id="R4ed4f05f0891498d"/>
-    <p:sldLayoutId xmlns:r="http://schemas.openxmlformats.org/officeDocument/2006/relationships" id="2147483655" r:id="Rec13fcc79efb4bd9"/>
-    <p:sldLayoutId xmlns:r="http://schemas.openxmlformats.org/officeDocument/2006/relationships" id="2147483656" r:id="Re0c2f20a9606420e"/>
-    <p:sldLayoutId xmlns:r="http://schemas.openxmlformats.org/officeDocument/2006/relationships" id="2147483657" r:id="Ra7a55a0301da432a"/>
-    <p:sldLayoutId xmlns:r="http://schemas.openxmlformats.org/officeDocument/2006/relationships" id="2147483658" r:id="Ra5f508fbbd814b79"/>
-    <p:sldLayoutId xmlns:r="http://schemas.openxmlformats.org/officeDocument/2006/relationships" id="2147483659" r:id="Rf51eadbeca554333"/>
+    <p:sldLayoutId xmlns:r="http://schemas.openxmlformats.org/officeDocument/2006/relationships" id="2147483649" r:id="R2f8d48ec25d04c00"/>
+    <p:sldLayoutId xmlns:r="http://schemas.openxmlformats.org/officeDocument/2006/relationships" id="2147483650" r:id="R75f4bcea58274560"/>
+    <p:sldLayoutId xmlns:r="http://schemas.openxmlformats.org/officeDocument/2006/relationships" id="2147483651" r:id="R16d59e23b2b84649"/>
+    <p:sldLayoutId xmlns:r="http://schemas.openxmlformats.org/officeDocument/2006/relationships" id="2147483652" r:id="Reed16fd2054948c0"/>
+    <p:sldLayoutId xmlns:r="http://schemas.openxmlformats.org/officeDocument/2006/relationships" id="2147483653" r:id="Rec16c2d581864422"/>
+    <p:sldLayoutId xmlns:r="http://schemas.openxmlformats.org/officeDocument/2006/relationships" id="2147483654" r:id="R548e5c23f24f4d3f"/>
+    <p:sldLayoutId xmlns:r="http://schemas.openxmlformats.org/officeDocument/2006/relationships" id="2147483655" r:id="R7619279a2a164d6d"/>
+    <p:sldLayoutId xmlns:r="http://schemas.openxmlformats.org/officeDocument/2006/relationships" id="2147483656" r:id="Rbff30041cb2f4256"/>
+    <p:sldLayoutId xmlns:r="http://schemas.openxmlformats.org/officeDocument/2006/relationships" id="2147483657" r:id="R0edf5b0a9ff54c17"/>
+    <p:sldLayoutId xmlns:r="http://schemas.openxmlformats.org/officeDocument/2006/relationships" id="2147483658" r:id="Ra1ce7e268d9146aa"/>
+    <p:sldLayoutId xmlns:r="http://schemas.openxmlformats.org/officeDocument/2006/relationships" id="2147483659" r:id="R4d0383bc9d34423a"/>
   </p:sldLayoutIdLst>
   <p:hf hdr="0" ftr="0" dt="0"/>
   <p:txStyles>

--- a/Mapped Curriculum Lessons/Grade 6/Lesson 02 - Operators and Integers/Operators and Integers - Slides.pptx
+++ b/Mapped Curriculum Lessons/Grade 6/Lesson 02 - Operators and Integers/Operators and Integers - Slides.pptx
@@ -2,28 +2,28 @@
 <file path=ppt/presentation.xml><?xml version="1.0" encoding="utf-8"?>
 <p:presentation xmlns:p="http://schemas.openxmlformats.org/presentationml/2006/main" embedTrueTypeFonts="1" saveSubsetFonts="0">
   <p:sldMasterIdLst>
-    <p:sldMasterId xmlns:r="http://schemas.openxmlformats.org/officeDocument/2006/relationships" id="2147483648" r:id="R691e2454aa9d4ca5"/>
+    <p:sldMasterId xmlns:r="http://schemas.openxmlformats.org/officeDocument/2006/relationships" id="2147483648" r:id="Rec9fefd857e74c75"/>
   </p:sldMasterIdLst>
   <p:notesMasterIdLst>
-    <p:notesMasterId xmlns:r="http://schemas.openxmlformats.org/officeDocument/2006/relationships" r:id="Rc6a619938ed040f1"/>
+    <p:notesMasterId xmlns:r="http://schemas.openxmlformats.org/officeDocument/2006/relationships" r:id="Rada8178759a94424"/>
   </p:notesMasterIdLst>
   <p:sldIdLst>
-    <p:sldId xmlns:r="http://schemas.openxmlformats.org/officeDocument/2006/relationships" id="256" r:id="R915c356a102f41aa"/>
-    <p:sldId xmlns:r="http://schemas.openxmlformats.org/officeDocument/2006/relationships" id="257" r:id="Rc44a8f68b026437b"/>
-    <p:sldId xmlns:r="http://schemas.openxmlformats.org/officeDocument/2006/relationships" id="258" r:id="R1414d77ce83e40ca"/>
-    <p:sldId xmlns:r="http://schemas.openxmlformats.org/officeDocument/2006/relationships" id="259" r:id="R225297c556464f08"/>
-    <p:sldId xmlns:r="http://schemas.openxmlformats.org/officeDocument/2006/relationships" id="260" r:id="R6f61ffce81b147bc"/>
-    <p:sldId xmlns:r="http://schemas.openxmlformats.org/officeDocument/2006/relationships" id="261" r:id="R7e2f09eb8ae24e03"/>
-    <p:sldId xmlns:r="http://schemas.openxmlformats.org/officeDocument/2006/relationships" id="262" r:id="R4a70f779d93e48aa"/>
-    <p:sldId xmlns:r="http://schemas.openxmlformats.org/officeDocument/2006/relationships" id="263" r:id="R25d27bc422ba470b"/>
-    <p:sldId xmlns:r="http://schemas.openxmlformats.org/officeDocument/2006/relationships" id="264" r:id="Raebcb81f35464868"/>
+    <p:sldId xmlns:r="http://schemas.openxmlformats.org/officeDocument/2006/relationships" id="256" r:id="R2f71104116ce4da9"/>
+    <p:sldId xmlns:r="http://schemas.openxmlformats.org/officeDocument/2006/relationships" id="257" r:id="Ra3917e4abe55473c"/>
+    <p:sldId xmlns:r="http://schemas.openxmlformats.org/officeDocument/2006/relationships" id="258" r:id="Rd4c68daf1c554f6e"/>
+    <p:sldId xmlns:r="http://schemas.openxmlformats.org/officeDocument/2006/relationships" id="259" r:id="Rdd84c4c8643e4cb7"/>
+    <p:sldId xmlns:r="http://schemas.openxmlformats.org/officeDocument/2006/relationships" id="260" r:id="Raaf76754e6f048d4"/>
+    <p:sldId xmlns:r="http://schemas.openxmlformats.org/officeDocument/2006/relationships" id="261" r:id="Rb7cbc30ded824800"/>
+    <p:sldId xmlns:r="http://schemas.openxmlformats.org/officeDocument/2006/relationships" id="262" r:id="R5c767e0fbf3446c9"/>
+    <p:sldId xmlns:r="http://schemas.openxmlformats.org/officeDocument/2006/relationships" id="263" r:id="Raf8dbe7495df41e9"/>
+    <p:sldId xmlns:r="http://schemas.openxmlformats.org/officeDocument/2006/relationships" id="264" r:id="R08e65ab6ce2a46df"/>
   </p:sldIdLst>
   <p:sldSz cx="12192000" cy="6858000"/>
   <p:notesSz cx="6858000" cy="9144000"/>
   <p:embeddedFontLst>
     <p:embeddedFont>
       <p:font typeface="JetBrains Mono"/>
-      <p:regular xmlns:r="http://schemas.openxmlformats.org/officeDocument/2006/relationships" r:id="R3659b2c496eb46f1"/>
+      <p:regular xmlns:r="http://schemas.openxmlformats.org/officeDocument/2006/relationships" r:id="R52702d408150420e"/>
     </p:embeddedFont>
   </p:embeddedFontLst>
 </p:presentation>
@@ -1071,7 +1071,7 @@
           <p:nvPr/>
         </p:nvPicPr>
         <p:blipFill rotWithShape="1">
-          <a:blip xmlns:r="http://schemas.openxmlformats.org/officeDocument/2006/relationships" xmlns:a="http://schemas.openxmlformats.org/drawingml/2006/main" r:embed="R5e14108ccbdd49db"/>
+          <a:blip xmlns:r="http://schemas.openxmlformats.org/officeDocument/2006/relationships" xmlns:a="http://schemas.openxmlformats.org/drawingml/2006/main" r:embed="Rb78a1e65d3524dab"/>
           <a:stretch xmlns:a="http://schemas.openxmlformats.org/drawingml/2006/main"/>
         </p:blipFill>
         <p:spPr>
@@ -1451,7 +1451,7 @@
           <p:nvPr/>
         </p:nvPicPr>
         <p:blipFill rotWithShape="1">
-          <a:blip xmlns:r="http://schemas.openxmlformats.org/officeDocument/2006/relationships" xmlns:a="http://schemas.openxmlformats.org/drawingml/2006/main" r:embed="R16291421d28c430e">
+          <a:blip xmlns:r="http://schemas.openxmlformats.org/officeDocument/2006/relationships" xmlns:a="http://schemas.openxmlformats.org/drawingml/2006/main" r:embed="Rce714ed77fb14b6e">
             <a:alphaModFix amt="28000"/>
           </a:blip>
           <a:stretch xmlns:a="http://schemas.openxmlformats.org/drawingml/2006/main"/>
@@ -1664,7 +1664,7 @@
           <p:nvPr/>
         </p:nvPicPr>
         <p:blipFill rotWithShape="1">
-          <a:blip xmlns:r="http://schemas.openxmlformats.org/officeDocument/2006/relationships" xmlns:a="http://schemas.openxmlformats.org/drawingml/2006/main" r:embed="Rd4d12c909d8148f2">
+          <a:blip xmlns:r="http://schemas.openxmlformats.org/officeDocument/2006/relationships" xmlns:a="http://schemas.openxmlformats.org/drawingml/2006/main" r:embed="Rc1992b3e88664e6f">
             <a:alphaModFix amt="28000"/>
           </a:blip>
           <a:stretch xmlns:a="http://schemas.openxmlformats.org/drawingml/2006/main"/>
@@ -1899,7 +1899,7 @@
           <p:nvPr/>
         </p:nvPicPr>
         <p:blipFill rotWithShape="1">
-          <a:blip xmlns:r="http://schemas.openxmlformats.org/officeDocument/2006/relationships" xmlns:a="http://schemas.openxmlformats.org/drawingml/2006/main" r:embed="R46cfa3340da643b3">
+          <a:blip xmlns:r="http://schemas.openxmlformats.org/officeDocument/2006/relationships" xmlns:a="http://schemas.openxmlformats.org/drawingml/2006/main" r:embed="R470e1549c19b4069">
             <a:alphaModFix amt="28000"/>
           </a:blip>
           <a:stretch xmlns:a="http://schemas.openxmlformats.org/drawingml/2006/main"/>
@@ -2176,7 +2176,7 @@
           <p:nvPr/>
         </p:nvPicPr>
         <p:blipFill rotWithShape="1">
-          <a:blip xmlns:r="http://schemas.openxmlformats.org/officeDocument/2006/relationships" xmlns:a="http://schemas.openxmlformats.org/drawingml/2006/main" r:embed="R1a5c8b92ba10453c">
+          <a:blip xmlns:r="http://schemas.openxmlformats.org/officeDocument/2006/relationships" xmlns:a="http://schemas.openxmlformats.org/drawingml/2006/main" r:embed="R6b417b829d6c4b25">
             <a:alphaModFix amt="28000"/>
           </a:blip>
           <a:stretch xmlns:a="http://schemas.openxmlformats.org/drawingml/2006/main"/>
@@ -2451,7 +2451,7 @@
           <p:nvPr/>
         </p:nvPicPr>
         <p:blipFill rotWithShape="1">
-          <a:blip xmlns:r="http://schemas.openxmlformats.org/officeDocument/2006/relationships" xmlns:a="http://schemas.openxmlformats.org/drawingml/2006/main" r:embed="Rd554d3ae6d7d4ccd">
+          <a:blip xmlns:r="http://schemas.openxmlformats.org/officeDocument/2006/relationships" xmlns:a="http://schemas.openxmlformats.org/drawingml/2006/main" r:embed="Rc67654ac18d14a0a">
             <a:alphaModFix amt="28000"/>
           </a:blip>
           <a:stretch xmlns:a="http://schemas.openxmlformats.org/drawingml/2006/main"/>
@@ -2875,7 +2875,7 @@
           <p:nvPr/>
         </p:nvPicPr>
         <p:blipFill rotWithShape="1">
-          <a:blip xmlns:r="http://schemas.openxmlformats.org/officeDocument/2006/relationships" xmlns:a="http://schemas.openxmlformats.org/drawingml/2006/main" r:embed="Rd88e0b5b03094756">
+          <a:blip xmlns:r="http://schemas.openxmlformats.org/officeDocument/2006/relationships" xmlns:a="http://schemas.openxmlformats.org/drawingml/2006/main" r:embed="R8c0a2c4bfe3b4aaa">
             <a:alphaModFix amt="28000"/>
           </a:blip>
           <a:stretch xmlns:a="http://schemas.openxmlformats.org/drawingml/2006/main"/>
@@ -3016,7 +3016,7 @@
           <p:nvPr/>
         </p:nvPicPr>
         <p:blipFill rotWithShape="1">
-          <a:blip xmlns:r="http://schemas.openxmlformats.org/officeDocument/2006/relationships" xmlns:a="http://schemas.openxmlformats.org/drawingml/2006/main" r:embed="R037c8e0d76c94d4c">
+          <a:blip xmlns:r="http://schemas.openxmlformats.org/officeDocument/2006/relationships" xmlns:a="http://schemas.openxmlformats.org/drawingml/2006/main" r:embed="R7ecc1d45c4174a2b">
             <a:alphaModFix amt="28000"/>
           </a:blip>
           <a:stretch xmlns:a="http://schemas.openxmlformats.org/drawingml/2006/main"/>
@@ -3130,7 +3130,7 @@
           <p:nvPr/>
         </p:nvPicPr>
         <p:blipFill rotWithShape="1">
-          <a:blip xmlns:r="http://schemas.openxmlformats.org/officeDocument/2006/relationships" xmlns:a="http://schemas.openxmlformats.org/drawingml/2006/main" r:embed="R092d6563d2954c15">
+          <a:blip xmlns:r="http://schemas.openxmlformats.org/officeDocument/2006/relationships" xmlns:a="http://schemas.openxmlformats.org/drawingml/2006/main" r:embed="R3c456760eb424a40">
             <a:alphaModFix amt="28000"/>
           </a:blip>
           <a:stretch xmlns:a="http://schemas.openxmlformats.org/drawingml/2006/main"/>
@@ -3457,7 +3457,7 @@
           <p:nvPr/>
         </p:nvPicPr>
         <p:blipFill rotWithShape="1">
-          <a:blip xmlns:r="http://schemas.openxmlformats.org/officeDocument/2006/relationships" xmlns:a="http://schemas.openxmlformats.org/drawingml/2006/main" r:embed="R84cbb884201744f2">
+          <a:blip xmlns:r="http://schemas.openxmlformats.org/officeDocument/2006/relationships" xmlns:a="http://schemas.openxmlformats.org/drawingml/2006/main" r:embed="R872a44af0c9444c5">
             <a:alphaModFix amt="28000"/>
           </a:blip>
           <a:stretch xmlns:a="http://schemas.openxmlformats.org/drawingml/2006/main"/>
@@ -3745,7 +3745,7 @@
           <p:nvPr/>
         </p:nvPicPr>
         <p:blipFill rotWithShape="1">
-          <a:blip xmlns:r="http://schemas.openxmlformats.org/officeDocument/2006/relationships" xmlns:a="http://schemas.openxmlformats.org/drawingml/2006/main" r:embed="Reb70eccc99d04a70">
+          <a:blip xmlns:r="http://schemas.openxmlformats.org/officeDocument/2006/relationships" xmlns:a="http://schemas.openxmlformats.org/drawingml/2006/main" r:embed="R7afd50b1f62148b7">
             <a:alphaModFix amt="28000"/>
           </a:blip>
           <a:stretch xmlns:a="http://schemas.openxmlformats.org/drawingml/2006/main"/>
@@ -3982,17 +3982,17 @@
   </p:cSld>
   <p:clrMap bg1="lt1" tx1="dk1" bg2="lt2" tx2="dk2" accent1="accent1" accent2="accent2" accent3="accent3" accent4="accent4" accent5="accent5" accent6="accent6" hlink="hlink" folHlink="folHlink"/>
   <p:sldLayoutIdLst>
-    <p:sldLayoutId xmlns:r="http://schemas.openxmlformats.org/officeDocument/2006/relationships" id="2147483649" r:id="R2f8d48ec25d04c00"/>
-    <p:sldLayoutId xmlns:r="http://schemas.openxmlformats.org/officeDocument/2006/relationships" id="2147483650" r:id="R75f4bcea58274560"/>
-    <p:sldLayoutId xmlns:r="http://schemas.openxmlformats.org/officeDocument/2006/relationships" id="2147483651" r:id="R16d59e23b2b84649"/>
-    <p:sldLayoutId xmlns:r="http://schemas.openxmlformats.org/officeDocument/2006/relationships" id="2147483652" r:id="Reed16fd2054948c0"/>
-    <p:sldLayoutId xmlns:r="http://schemas.openxmlformats.org/officeDocument/2006/relationships" id="2147483653" r:id="Rec16c2d581864422"/>
-    <p:sldLayoutId xmlns:r="http://schemas.openxmlformats.org/officeDocument/2006/relationships" id="2147483654" r:id="R548e5c23f24f4d3f"/>
-    <p:sldLayoutId xmlns:r="http://schemas.openxmlformats.org/officeDocument/2006/relationships" id="2147483655" r:id="R7619279a2a164d6d"/>
-    <p:sldLayoutId xmlns:r="http://schemas.openxmlformats.org/officeDocument/2006/relationships" id="2147483656" r:id="Rbff30041cb2f4256"/>
-    <p:sldLayoutId xmlns:r="http://schemas.openxmlformats.org/officeDocument/2006/relationships" id="2147483657" r:id="R0edf5b0a9ff54c17"/>
-    <p:sldLayoutId xmlns:r="http://schemas.openxmlformats.org/officeDocument/2006/relationships" id="2147483658" r:id="Ra1ce7e268d9146aa"/>
-    <p:sldLayoutId xmlns:r="http://schemas.openxmlformats.org/officeDocument/2006/relationships" id="2147483659" r:id="R4d0383bc9d34423a"/>
+    <p:sldLayoutId xmlns:r="http://schemas.openxmlformats.org/officeDocument/2006/relationships" id="2147483649" r:id="R54338d03a98144e2"/>
+    <p:sldLayoutId xmlns:r="http://schemas.openxmlformats.org/officeDocument/2006/relationships" id="2147483650" r:id="R24343ace16484f47"/>
+    <p:sldLayoutId xmlns:r="http://schemas.openxmlformats.org/officeDocument/2006/relationships" id="2147483651" r:id="Ra583754f831b494c"/>
+    <p:sldLayoutId xmlns:r="http://schemas.openxmlformats.org/officeDocument/2006/relationships" id="2147483652" r:id="Rf072d575c9a84b37"/>
+    <p:sldLayoutId xmlns:r="http://schemas.openxmlformats.org/officeDocument/2006/relationships" id="2147483653" r:id="Rdce2b8f6ca7e4d8d"/>
+    <p:sldLayoutId xmlns:r="http://schemas.openxmlformats.org/officeDocument/2006/relationships" id="2147483654" r:id="Rd54bb224401b455f"/>
+    <p:sldLayoutId xmlns:r="http://schemas.openxmlformats.org/officeDocument/2006/relationships" id="2147483655" r:id="R0842b00cf29c4a83"/>
+    <p:sldLayoutId xmlns:r="http://schemas.openxmlformats.org/officeDocument/2006/relationships" id="2147483656" r:id="Recf40d29ecc34745"/>
+    <p:sldLayoutId xmlns:r="http://schemas.openxmlformats.org/officeDocument/2006/relationships" id="2147483657" r:id="R0c004a7228fd45b6"/>
+    <p:sldLayoutId xmlns:r="http://schemas.openxmlformats.org/officeDocument/2006/relationships" id="2147483658" r:id="Rd0a6e906651c4852"/>
+    <p:sldLayoutId xmlns:r="http://schemas.openxmlformats.org/officeDocument/2006/relationships" id="2147483659" r:id="R63046973ddf14c42"/>
   </p:sldLayoutIdLst>
   <p:hf hdr="0" ftr="0" dt="0"/>
   <p:txStyles>
